--- a/Documents/프로젝트_기획서_발표자료_귀기울임.pptx
+++ b/Documents/프로젝트_기획서_발표자료_귀기울임.pptx
@@ -5638,11 +5638,11 @@
 </file>
 
 <file path=ppt/slides/slide10.xml><?xml version="1.0" encoding="utf-8"?>
-<p:sld xmlns:a="http://schemas.openxmlformats.org/drawingml/2006/main" xmlns:r="http://schemas.openxmlformats.org/officeDocument/2006/relationships" xmlns:mc="http://schemas.openxmlformats.org/markup-compatibility/2006" xmlns:mv="urn:schemas-microsoft-com:mac:vml" xmlns:p="http://schemas.openxmlformats.org/presentationml/2006/main" xmlns:c="http://schemas.openxmlformats.org/drawingml/2006/chart" xmlns:dgm="http://schemas.openxmlformats.org/drawingml/2006/diagram" xmlns:o="urn:schemas-microsoft-com:office:office" xmlns:v="urn:schemas-microsoft-com:vml" xmlns:pvml="urn:schemas-microsoft-com:office:powerpoint" xmlns:com="http://schemas.openxmlformats.org/drawingml/2006/compatibility" xmlns:p14="http://schemas.microsoft.com/office/powerpoint/2010/main" xmlns:p15="http://schemas.microsoft.com/office/powerpoint/2012/main" xmlns:ahyp="http://schemas.microsoft.com/office/drawing/2018/hyperlinkcolor">
+<p:sld xmlns:r="http://schemas.openxmlformats.org/officeDocument/2006/relationships" xmlns:c="http://schemas.openxmlformats.org/drawingml/2006/chart" xmlns:a="http://schemas.openxmlformats.org/drawingml/2006/main" xmlns:dgm="http://schemas.openxmlformats.org/drawingml/2006/diagram" xmlns:dsp="http://schemas.microsoft.com/office/drawing/2008/diagram" xmlns:p="http://schemas.openxmlformats.org/presentationml/2006/main">
   <p:cSld>
     <p:spTree>
       <p:nvGrpSpPr>
-        <p:cNvPr id="342" name="Shape 342"/>
+        <p:cNvPr id="1" name=""/>
         <p:cNvGrpSpPr/>
         <p:nvPr/>
       </p:nvGrpSpPr>
@@ -5988,8 +5988,8 @@
         </p:nvSpPr>
         <p:spPr>
           <a:xfrm>
-            <a:off x="1485900" y="4940300"/>
-            <a:ext cx="4264304" cy="1438275"/>
+            <a:off x="1485905" y="4432300"/>
+            <a:ext cx="4264304" cy="1010871"/>
           </a:xfrm>
           <a:prstGeom prst="rect">
             <a:avLst/>
@@ -6000,12 +6000,12 @@
           </a:ln>
         </p:spPr>
         <p:txBody>
-          <a:bodyPr anchorCtr="0" anchor="t" bIns="25400" lIns="25400" spcFirstLastPara="1" rIns="25400" wrap="square" tIns="25400">
+          <a:bodyPr wrap="square" lIns="25400" tIns="25400" rIns="25400" bIns="25400" anchor="t" anchorCtr="0">
             <a:normAutofit/>
           </a:bodyPr>
           <a:lstStyle/>
           <a:p>
-            <a:pPr indent="0" lvl="0" marL="0" marR="0" rtl="0" algn="l">
+            <a:pPr marL="0" marR="0" lvl="0" indent="0" algn="l" rtl="0">
               <a:lnSpc>
                 <a:spcPct val="129729"/>
               </a:lnSpc>
@@ -6016,16 +6016,17 @@
                 <a:spcPts val="0"/>
               </a:spcAft>
               <a:buClr>
-                <a:srgbClr val="5B7F86"/>
-              </a:buClr>
-              <a:buSzPts val="2400"/>
+                <a:srgbClr val="5b7f86"/>
+              </a:buClr>
+              <a:buSzPct val="25000"/>
               <a:buFont typeface="Noto Sans"/>
               <a:buNone/>
-            </a:pPr>
-            <a:r>
-              <a:rPr b="1" i="0" lang="en-US" sz="2400" u="none" cap="none" strike="noStrike">
+              <a:defRPr/>
+            </a:pPr>
+            <a:r>
+              <a:rPr lang="en-US" sz="2400" b="1" i="0" u="none" strike="noStrike" cap="none">
                 <a:solidFill>
-                  <a:srgbClr val="5B7F86"/>
+                  <a:srgbClr val="5b7f86"/>
                 </a:solidFill>
                 <a:latin typeface="Noto Sans"/>
                 <a:ea typeface="Noto Sans"/>
@@ -6035,9 +6036,9 @@
               <a:t>Model: </a:t>
             </a:r>
             <a:r>
-              <a:rPr b="0" i="0" lang="en-US" sz="2400" u="none" cap="none" strike="noStrike">
+              <a:rPr lang="en-US" sz="2400" b="0" i="0" u="none" strike="noStrike" cap="none">
                 <a:solidFill>
-                  <a:srgbClr val="1B2B2E"/>
+                  <a:srgbClr val="1b2b2e"/>
                 </a:solidFill>
                 <a:latin typeface="Noto Sans"/>
                 <a:ea typeface="Noto Sans"/>
@@ -6046,7 +6047,7 @@
               </a:rPr>
               <a:t>LSTM Autoencoder + LightGBM</a:t>
             </a:r>
-            <a:endParaRPr b="0" i="0" sz="2400" u="none" cap="none" strike="noStrike">
+            <a:endParaRPr sz="2400" b="0" i="0" u="none" strike="noStrike" cap="none">
               <a:solidFill>
                 <a:schemeClr val="dk1"/>
               </a:solidFill>
@@ -6066,8 +6067,8 @@
         </p:nvSpPr>
         <p:spPr>
           <a:xfrm>
-            <a:off x="1485900" y="6553200"/>
-            <a:ext cx="4264304" cy="1727200"/>
+            <a:off x="1485900" y="5588489"/>
+            <a:ext cx="4264304" cy="2691911"/>
           </a:xfrm>
           <a:prstGeom prst="rect">
             <a:avLst/>
@@ -6078,12 +6079,12 @@
           </a:ln>
         </p:spPr>
         <p:txBody>
-          <a:bodyPr anchorCtr="0" anchor="t" bIns="25400" lIns="25400" spcFirstLastPara="1" rIns="25400" wrap="square" tIns="25400">
-            <a:normAutofit/>
-          </a:bodyPr>
-          <a:lstStyle/>
-          <a:p>
-            <a:pPr indent="0" lvl="0" marL="0" marR="0" rtl="0" algn="l">
+          <a:bodyPr wrap="square" lIns="25400" tIns="25400" rIns="25400" bIns="25400" anchor="t" anchorCtr="0">
+            <a:normAutofit lnSpcReduction="10000"/>
+          </a:bodyPr>
+          <a:lstStyle/>
+          <a:p>
+            <a:pPr marL="0" marR="0" lvl="0" indent="0" algn="l" rtl="0">
               <a:lnSpc>
                 <a:spcPct val="129729"/>
               </a:lnSpc>
@@ -6094,16 +6095,17 @@
                 <a:spcPts val="0"/>
               </a:spcAft>
               <a:buClr>
-                <a:srgbClr val="5B7F86"/>
-              </a:buClr>
-              <a:buSzPts val="2400"/>
+                <a:srgbClr val="5b7f86"/>
+              </a:buClr>
+              <a:buSzPct val="25000"/>
               <a:buFont typeface="Noto Sans"/>
               <a:buNone/>
-            </a:pPr>
-            <a:r>
-              <a:rPr b="1" i="0" lang="en-US" sz="2400" u="none" cap="none" strike="noStrike">
+              <a:defRPr/>
+            </a:pPr>
+            <a:r>
+              <a:rPr lang="en-US" sz="2400" b="1" i="0" u="none" strike="noStrike" cap="none">
                 <a:solidFill>
-                  <a:srgbClr val="5B7F86"/>
+                  <a:srgbClr val="5b7f86"/>
                 </a:solidFill>
                 <a:latin typeface="Noto Sans"/>
                 <a:ea typeface="Noto Sans"/>
@@ -6113,25 +6115,229 @@
               <a:t>Method: </a:t>
             </a:r>
             <a:r>
-              <a:rPr b="0" i="0" lang="en-US" sz="2400" u="none" cap="none" strike="noStrike">
+              <a:rPr lang="en-US" sz="2400" b="1" i="0" u="none" strike="noStrike" cap="none">
                 <a:solidFill>
-                  <a:srgbClr val="1B2B2E"/>
+                  <a:srgbClr val="1b2b2e"/>
                 </a:solidFill>
                 <a:latin typeface="Noto Sans"/>
                 <a:ea typeface="Noto Sans"/>
                 <a:cs typeface="Noto Sans"/>
                 <a:sym typeface="Noto Sans"/>
               </a:rPr>
-              <a:t>PMData 활용, 소수 클래스 SMOTE 보정, Group K-Fold 검증</a:t>
-            </a:r>
-            <a:endParaRPr b="0" i="0" sz="2400" u="none" cap="none" strike="noStrike">
-              <a:solidFill>
-                <a:schemeClr val="dk1"/>
-              </a:solidFill>
-              <a:latin typeface="Calibri"/>
-              <a:ea typeface="Calibri"/>
-              <a:cs typeface="Calibri"/>
-              <a:sym typeface="Calibri"/>
+              <a:t>PMData</a:t>
+            </a:r>
+            <a:r>
+              <a:rPr lang="en-US" altLang="ko-KR" sz="2400" b="0" i="0" u="none" strike="noStrike" cap="none">
+                <a:solidFill>
+                  <a:srgbClr val="1b2b2e"/>
+                </a:solidFill>
+                <a:latin typeface="Noto Sans"/>
+                <a:ea typeface="Noto Sans"/>
+                <a:cs typeface="Noto Sans"/>
+                <a:sym typeface="Noto Sans"/>
+              </a:rPr>
+              <a:t>(</a:t>
+            </a:r>
+            <a:r>
+              <a:rPr lang="ko-KR" altLang="en-US" sz="2400" b="0" i="0" u="none" strike="noStrike" cap="none">
+                <a:solidFill>
+                  <a:srgbClr val="1b2b2e"/>
+                </a:solidFill>
+                <a:latin typeface="Noto Sans"/>
+                <a:ea typeface="Noto Sans"/>
+                <a:cs typeface="Noto Sans"/>
+                <a:sym typeface="Noto Sans"/>
+              </a:rPr>
+              <a:t>비지도 이상탐지</a:t>
+            </a:r>
+            <a:r>
+              <a:rPr lang="en-US" altLang="ko-KR" sz="2400" b="0" i="0" u="none" strike="noStrike" cap="none">
+                <a:solidFill>
+                  <a:srgbClr val="1b2b2e"/>
+                </a:solidFill>
+                <a:latin typeface="Noto Sans"/>
+                <a:ea typeface="Noto Sans"/>
+                <a:cs typeface="Noto Sans"/>
+                <a:sym typeface="Noto Sans"/>
+              </a:rPr>
+              <a:t>)</a:t>
+            </a:r>
+            <a:r>
+              <a:rPr lang="ko-KR" altLang="en-US" sz="2400" b="0" i="0" u="none" strike="noStrike" cap="none">
+                <a:solidFill>
+                  <a:srgbClr val="1b2b2e"/>
+                </a:solidFill>
+                <a:latin typeface="Noto Sans"/>
+                <a:ea typeface="Noto Sans"/>
+                <a:cs typeface="Noto Sans"/>
+                <a:sym typeface="Noto Sans"/>
+              </a:rPr>
+              <a:t> </a:t>
+            </a:r>
+            <a:r>
+              <a:rPr lang="en-US" altLang="ko-KR" sz="2400" b="0" i="0" u="none" strike="noStrike" cap="none">
+                <a:solidFill>
+                  <a:srgbClr val="1b2b2e"/>
+                </a:solidFill>
+                <a:latin typeface="Noto Sans"/>
+                <a:ea typeface="Noto Sans"/>
+                <a:cs typeface="Noto Sans"/>
+                <a:sym typeface="Noto Sans"/>
+              </a:rPr>
+              <a:t>+</a:t>
+            </a:r>
+            <a:r>
+              <a:rPr lang="ko-KR" altLang="en-US" sz="2400" b="0" i="0" u="none" strike="noStrike" cap="none">
+                <a:solidFill>
+                  <a:srgbClr val="1b2b2e"/>
+                </a:solidFill>
+                <a:latin typeface="Noto Sans"/>
+                <a:ea typeface="Noto Sans"/>
+                <a:cs typeface="Noto Sans"/>
+                <a:sym typeface="Noto Sans"/>
+              </a:rPr>
+              <a:t> </a:t>
+            </a:r>
+            <a:r>
+              <a:rPr lang="en-US" altLang="ko-KR" sz="2400" b="1" i="0" u="none" strike="noStrike" cap="none">
+                <a:solidFill>
+                  <a:srgbClr val="1b2b2e"/>
+                </a:solidFill>
+                <a:latin typeface="Noto Sans"/>
+                <a:ea typeface="Noto Sans"/>
+                <a:cs typeface="Noto Sans"/>
+                <a:sym typeface="Noto Sans"/>
+              </a:rPr>
+              <a:t>GLOBEM</a:t>
+            </a:r>
+            <a:r>
+              <a:rPr lang="en-US" altLang="ko-KR" sz="2400" b="0" i="0" u="none" strike="noStrike" cap="none">
+                <a:solidFill>
+                  <a:srgbClr val="1b2b2e"/>
+                </a:solidFill>
+                <a:latin typeface="Noto Sans"/>
+                <a:ea typeface="Noto Sans"/>
+                <a:cs typeface="Noto Sans"/>
+                <a:sym typeface="Noto Sans"/>
+              </a:rPr>
+              <a:t>(BDI-II</a:t>
+            </a:r>
+            <a:r>
+              <a:rPr lang="ko-KR" altLang="en-US" sz="2400" b="0" i="0" u="none" strike="noStrike" cap="none">
+                <a:solidFill>
+                  <a:srgbClr val="1b2b2e"/>
+                </a:solidFill>
+                <a:latin typeface="Noto Sans"/>
+                <a:ea typeface="Noto Sans"/>
+                <a:cs typeface="Noto Sans"/>
+                <a:sym typeface="Noto Sans"/>
+              </a:rPr>
+              <a:t> 라벨 지도학습</a:t>
+            </a:r>
+            <a:r>
+              <a:rPr lang="en-US" altLang="ko-KR" sz="2400" b="0" i="0" u="none" strike="noStrike" cap="none">
+                <a:solidFill>
+                  <a:srgbClr val="1b2b2e"/>
+                </a:solidFill>
+                <a:latin typeface="Noto Sans"/>
+                <a:ea typeface="Noto Sans"/>
+                <a:cs typeface="Noto Sans"/>
+                <a:sym typeface="Noto Sans"/>
+              </a:rPr>
+              <a:t>),</a:t>
+            </a:r>
+            <a:r>
+              <a:rPr lang="ko-KR" altLang="en-US" sz="2400" b="0" i="0" u="none" strike="noStrike" cap="none">
+                <a:solidFill>
+                  <a:srgbClr val="1b2b2e"/>
+                </a:solidFill>
+                <a:latin typeface="Noto Sans"/>
+                <a:ea typeface="Noto Sans"/>
+                <a:cs typeface="Noto Sans"/>
+                <a:sym typeface="Noto Sans"/>
+              </a:rPr>
+              <a:t> 소수 클래스 </a:t>
+            </a:r>
+            <a:r>
+              <a:rPr lang="en-US" altLang="ko-KR" sz="2400" b="0" i="0" u="none" strike="noStrike" cap="none">
+                <a:solidFill>
+                  <a:srgbClr val="1b2b2e"/>
+                </a:solidFill>
+                <a:latin typeface="Noto Sans"/>
+                <a:ea typeface="Noto Sans"/>
+                <a:cs typeface="Noto Sans"/>
+                <a:sym typeface="Noto Sans"/>
+              </a:rPr>
+              <a:t>SMOTE</a:t>
+            </a:r>
+            <a:r>
+              <a:rPr lang="ko-KR" altLang="en-US" sz="2400" b="0" i="0" u="none" strike="noStrike" cap="none">
+                <a:solidFill>
+                  <a:srgbClr val="1b2b2e"/>
+                </a:solidFill>
+                <a:latin typeface="Noto Sans"/>
+                <a:ea typeface="Noto Sans"/>
+                <a:cs typeface="Noto Sans"/>
+                <a:sym typeface="Noto Sans"/>
+              </a:rPr>
+              <a:t> 보정</a:t>
+            </a:r>
+            <a:r>
+              <a:rPr lang="en-US" altLang="ko-KR" sz="2400" b="0" i="0" u="none" strike="noStrike" cap="none">
+                <a:solidFill>
+                  <a:srgbClr val="1b2b2e"/>
+                </a:solidFill>
+                <a:latin typeface="Noto Sans"/>
+                <a:ea typeface="Noto Sans"/>
+                <a:cs typeface="Noto Sans"/>
+                <a:sym typeface="Noto Sans"/>
+              </a:rPr>
+              <a:t>,</a:t>
+            </a:r>
+            <a:r>
+              <a:rPr lang="ko-KR" altLang="en-US" sz="2400" b="0" i="0" u="none" strike="noStrike" cap="none">
+                <a:solidFill>
+                  <a:srgbClr val="1b2b2e"/>
+                </a:solidFill>
+                <a:latin typeface="Noto Sans"/>
+                <a:ea typeface="Noto Sans"/>
+                <a:cs typeface="Noto Sans"/>
+                <a:sym typeface="Noto Sans"/>
+              </a:rPr>
+              <a:t> </a:t>
+            </a:r>
+            <a:r>
+              <a:rPr lang="en-US" altLang="ko-KR" sz="2400" b="0" i="0" u="none" strike="noStrike" cap="none">
+                <a:solidFill>
+                  <a:srgbClr val="1b2b2e"/>
+                </a:solidFill>
+                <a:latin typeface="Noto Sans"/>
+                <a:ea typeface="Noto Sans"/>
+                <a:cs typeface="Noto Sans"/>
+                <a:sym typeface="Noto Sans"/>
+              </a:rPr>
+              <a:t>Group K-Fold</a:t>
+            </a:r>
+            <a:r>
+              <a:rPr lang="ko-KR" altLang="en-US" sz="2400" b="0" i="0" u="none" strike="noStrike" cap="none">
+                <a:solidFill>
+                  <a:srgbClr val="1b2b2e"/>
+                </a:solidFill>
+                <a:latin typeface="Noto Sans"/>
+                <a:ea typeface="Noto Sans"/>
+                <a:cs typeface="Noto Sans"/>
+                <a:sym typeface="Noto Sans"/>
+              </a:rPr>
+              <a:t> 검증</a:t>
+            </a:r>
+            <a:endParaRPr lang="ko-KR" altLang="en-US" sz="2400" b="0" i="0" u="none" strike="noStrike" cap="none">
+              <a:solidFill>
+                <a:srgbClr val="1b2b2e"/>
+              </a:solidFill>
+              <a:latin typeface="Noto Sans"/>
+              <a:ea typeface="Noto Sans"/>
+              <a:cs typeface="Noto Sans"/>
+              <a:sym typeface="Noto Sans"/>
             </a:endParaRPr>
           </a:p>
         </p:txBody>
@@ -9256,18 +9462,18 @@
 </file>
 
 <file path=ppt/slides/slide12.xml><?xml version="1.0" encoding="utf-8"?>
-<p:sld xmlns:a="http://schemas.openxmlformats.org/drawingml/2006/main" xmlns:r="http://schemas.openxmlformats.org/officeDocument/2006/relationships" xmlns:mc="http://schemas.openxmlformats.org/markup-compatibility/2006" xmlns:mv="urn:schemas-microsoft-com:mac:vml" xmlns:p="http://schemas.openxmlformats.org/presentationml/2006/main" xmlns:c="http://schemas.openxmlformats.org/drawingml/2006/chart" xmlns:dgm="http://schemas.openxmlformats.org/drawingml/2006/diagram" xmlns:o="urn:schemas-microsoft-com:office:office" xmlns:v="urn:schemas-microsoft-com:vml" xmlns:pvml="urn:schemas-microsoft-com:office:powerpoint" xmlns:com="http://schemas.openxmlformats.org/drawingml/2006/compatibility" xmlns:p14="http://schemas.microsoft.com/office/powerpoint/2010/main" xmlns:p15="http://schemas.microsoft.com/office/powerpoint/2012/main" xmlns:ahyp="http://schemas.microsoft.com/office/drawing/2018/hyperlinkcolor">
+<p:sld xmlns:r="http://schemas.openxmlformats.org/officeDocument/2006/relationships" xmlns:c="http://schemas.openxmlformats.org/drawingml/2006/chart" xmlns:a="http://schemas.openxmlformats.org/drawingml/2006/main" xmlns:dgm="http://schemas.openxmlformats.org/drawingml/2006/diagram" xmlns:dsp="http://schemas.microsoft.com/office/drawing/2008/diagram" xmlns:p="http://schemas.openxmlformats.org/presentationml/2006/main">
   <p:cSld>
     <p:bg>
-      <p:bgPr>
+      <p:bgPr shadeToTitle="0">
         <a:solidFill>
-          <a:srgbClr val="FFFFFF"/>
+          <a:srgbClr val="ffffff"/>
         </a:solidFill>
       </p:bgPr>
     </p:bg>
     <p:spTree>
       <p:nvGrpSpPr>
-        <p:cNvPr id="406" name="Shape 406"/>
+        <p:cNvPr id="1" name=""/>
         <p:cNvGrpSpPr/>
         <p:nvPr/>
       </p:nvGrpSpPr>
@@ -9287,32 +9493,32 @@
         </p:nvSpPr>
         <p:spPr>
           <a:xfrm>
-            <a:off x="1047750" y="1968500"/>
+            <a:off x="3184769" y="1858962"/>
             <a:ext cx="4978301" cy="7162800"/>
           </a:xfrm>
           <a:prstGeom prst="roundRect">
             <a:avLst>
-              <a:gd fmla="val 8419" name="adj"/>
+              <a:gd name="adj" fmla="val 8419"/>
             </a:avLst>
           </a:prstGeom>
           <a:noFill/>
-          <a:ln cap="flat" cmpd="sng" w="47625">
+          <a:ln w="47625" cap="flat" cmpd="sng">
             <a:solidFill>
-              <a:srgbClr val="8EC3C4"/>
+              <a:srgbClr val="8ec3c4"/>
             </a:solidFill>
             <a:prstDash val="solid"/>
             <a:round/>
-            <a:headEnd len="sm" w="sm" type="none"/>
-            <a:tailEnd len="sm" w="sm" type="none"/>
-          </a:ln>
-        </p:spPr>
-        <p:txBody>
-          <a:bodyPr anchorCtr="0" anchor="t" bIns="45700" lIns="91425" spcFirstLastPara="1" rIns="91425" wrap="square" tIns="45700">
+            <a:headEnd w="sm" len="sm"/>
+            <a:tailEnd w="sm" len="sm"/>
+          </a:ln>
+        </p:spPr>
+        <p:txBody>
+          <a:bodyPr wrap="square" lIns="91425" tIns="45700" rIns="91425" bIns="45700" anchor="t" anchorCtr="0">
             <a:noAutofit/>
           </a:bodyPr>
           <a:lstStyle/>
           <a:p>
-            <a:pPr indent="0" lvl="0" marL="0" marR="0" rtl="0" algn="l">
+            <a:pPr marL="0" marR="0" lvl="0" indent="0" algn="l" rtl="0">
               <a:lnSpc>
                 <a:spcPct val="100000"/>
               </a:lnSpc>
@@ -9325,14 +9531,12 @@
               <a:buClr>
                 <a:srgbClr val="000000"/>
               </a:buClr>
-              <a:buSzPts val="1800"/>
+              <a:buSzPct val="25000"/>
               <a:buFont typeface="Arial"/>
               <a:buNone/>
-            </a:pPr>
-            <a:r>
-              <a:t/>
-            </a:r>
-            <a:endParaRPr b="0" i="0" sz="1800" u="none" cap="none" strike="noStrike">
+              <a:defRPr/>
+            </a:pPr>
+            <a:endParaRPr sz="1800" b="0" i="0" u="none" strike="noStrike" cap="none">
               <a:solidFill>
                 <a:schemeClr val="dk1"/>
               </a:solidFill>
@@ -9352,28 +9556,28 @@
         </p:nvSpPr>
         <p:spPr>
           <a:xfrm>
-            <a:off x="3079700" y="1524000"/>
+            <a:off x="5226244" y="1414462"/>
             <a:ext cx="914400" cy="914400"/>
           </a:xfrm>
           <a:prstGeom prst="roundRect">
             <a:avLst>
-              <a:gd fmla="val 18750" name="adj"/>
+              <a:gd name="adj" fmla="val 18750"/>
             </a:avLst>
           </a:prstGeom>
           <a:solidFill>
-            <a:srgbClr val="9ED3D0"/>
+            <a:srgbClr val="9ed3d0"/>
           </a:solidFill>
           <a:ln>
             <a:noFill/>
           </a:ln>
         </p:spPr>
         <p:txBody>
-          <a:bodyPr anchorCtr="0" anchor="t" bIns="45700" lIns="91425" spcFirstLastPara="1" rIns="91425" wrap="square" tIns="45700">
+          <a:bodyPr wrap="square" lIns="91425" tIns="45700" rIns="91425" bIns="45700" anchor="t" anchorCtr="0">
             <a:noAutofit/>
           </a:bodyPr>
           <a:lstStyle/>
           <a:p>
-            <a:pPr indent="0" lvl="0" marL="0" marR="0" rtl="0" algn="l">
+            <a:pPr marL="0" marR="0" lvl="0" indent="0" algn="l" rtl="0">
               <a:lnSpc>
                 <a:spcPct val="100000"/>
               </a:lnSpc>
@@ -9386,14 +9590,12 @@
               <a:buClr>
                 <a:srgbClr val="000000"/>
               </a:buClr>
-              <a:buSzPts val="1800"/>
+              <a:buSzPct val="25000"/>
               <a:buFont typeface="Arial"/>
               <a:buNone/>
-            </a:pPr>
-            <a:r>
-              <a:t/>
-            </a:r>
-            <a:endParaRPr b="0" i="0" sz="1800" u="none" cap="none" strike="noStrike">
+              <a:defRPr/>
+            </a:pPr>
+            <a:endParaRPr sz="1800" b="0" i="0" u="none" strike="noStrike" cap="none">
               <a:solidFill>
                 <a:schemeClr val="dk1"/>
               </a:solidFill>
@@ -9413,28 +9615,28 @@
         </p:nvSpPr>
         <p:spPr>
           <a:xfrm>
-            <a:off x="3413075" y="1816100"/>
+            <a:off x="5550094" y="1706562"/>
             <a:ext cx="247650" cy="323850"/>
           </a:xfrm>
           <a:prstGeom prst="roundRect">
             <a:avLst>
-              <a:gd fmla="val 23077" name="adj"/>
+              <a:gd name="adj" fmla="val 23077"/>
             </a:avLst>
           </a:prstGeom>
           <a:solidFill>
-            <a:srgbClr val="FFFFFF"/>
+            <a:srgbClr val="ffffff"/>
           </a:solidFill>
           <a:ln>
             <a:noFill/>
           </a:ln>
         </p:spPr>
         <p:txBody>
-          <a:bodyPr anchorCtr="0" anchor="t" bIns="45700" lIns="91425" spcFirstLastPara="1" rIns="91425" wrap="square" tIns="45700">
+          <a:bodyPr wrap="square" lIns="91425" tIns="45700" rIns="91425" bIns="45700" anchor="t" anchorCtr="0">
             <a:noAutofit/>
           </a:bodyPr>
           <a:lstStyle/>
           <a:p>
-            <a:pPr indent="0" lvl="0" marL="0" marR="0" rtl="0" algn="l">
+            <a:pPr marL="0" marR="0" lvl="0" indent="0" algn="l" rtl="0">
               <a:lnSpc>
                 <a:spcPct val="100000"/>
               </a:lnSpc>
@@ -9447,14 +9649,12 @@
               <a:buClr>
                 <a:srgbClr val="000000"/>
               </a:buClr>
-              <a:buSzPts val="1800"/>
+              <a:buSzPct val="25000"/>
               <a:buFont typeface="Arial"/>
               <a:buNone/>
-            </a:pPr>
-            <a:r>
-              <a:t/>
-            </a:r>
-            <a:endParaRPr b="0" i="0" sz="1800" u="none" cap="none" strike="noStrike">
+              <a:defRPr/>
+            </a:pPr>
+            <a:endParaRPr sz="1800" b="0" i="0" u="none" strike="noStrike" cap="none">
               <a:solidFill>
                 <a:schemeClr val="dk1"/>
               </a:solidFill>
@@ -9474,28 +9674,28 @@
         </p:nvSpPr>
         <p:spPr>
           <a:xfrm>
-            <a:off x="1514475" y="2679700"/>
+            <a:off x="3651494" y="2570162"/>
             <a:ext cx="4044851" cy="1421011"/>
           </a:xfrm>
           <a:prstGeom prst="roundRect">
             <a:avLst>
-              <a:gd fmla="val 50000" name="adj"/>
+              <a:gd name="adj" fmla="val 50000"/>
             </a:avLst>
           </a:prstGeom>
           <a:solidFill>
-            <a:srgbClr val="DCECEC"/>
+            <a:srgbClr val="dcecec"/>
           </a:solidFill>
           <a:ln>
             <a:noFill/>
           </a:ln>
         </p:spPr>
         <p:txBody>
-          <a:bodyPr anchorCtr="0" anchor="t" bIns="45700" lIns="91425" spcFirstLastPara="1" rIns="91425" wrap="square" tIns="45700">
+          <a:bodyPr wrap="square" lIns="91425" tIns="45700" rIns="91425" bIns="45700" anchor="t" anchorCtr="0">
             <a:noAutofit/>
           </a:bodyPr>
           <a:lstStyle/>
           <a:p>
-            <a:pPr indent="0" lvl="0" marL="0" marR="0" rtl="0" algn="l">
+            <a:pPr marL="0" marR="0" lvl="0" indent="0" algn="l" rtl="0">
               <a:lnSpc>
                 <a:spcPct val="100000"/>
               </a:lnSpc>
@@ -9508,14 +9708,12 @@
               <a:buClr>
                 <a:srgbClr val="000000"/>
               </a:buClr>
-              <a:buSzPts val="1800"/>
+              <a:buSzPct val="25000"/>
               <a:buFont typeface="Arial"/>
               <a:buNone/>
-            </a:pPr>
-            <a:r>
-              <a:t/>
-            </a:r>
-            <a:endParaRPr b="0" i="0" sz="1800" u="none" cap="none" strike="noStrike">
+              <a:defRPr/>
+            </a:pPr>
+            <a:endParaRPr sz="1800" b="0" i="0" u="none" strike="noStrike" cap="none">
               <a:solidFill>
                 <a:schemeClr val="dk1"/>
               </a:solidFill>
@@ -9535,8 +9733,8 @@
         </p:nvSpPr>
         <p:spPr>
           <a:xfrm>
-            <a:off x="1644400" y="3174250"/>
-            <a:ext cx="3785100" cy="482700"/>
+            <a:off x="3793631" y="2952089"/>
+            <a:ext cx="3785100" cy="849046"/>
           </a:xfrm>
           <a:prstGeom prst="rect">
             <a:avLst/>
@@ -9547,12 +9745,12 @@
           </a:ln>
         </p:spPr>
         <p:txBody>
-          <a:bodyPr anchorCtr="0" anchor="t" bIns="25400" lIns="25400" spcFirstLastPara="1" rIns="25400" wrap="square" tIns="25400">
+          <a:bodyPr wrap="square" lIns="25400" tIns="25400" rIns="25400" bIns="25400" anchor="t" anchorCtr="0">
             <a:normAutofit/>
           </a:bodyPr>
           <a:lstStyle/>
           <a:p>
-            <a:pPr indent="0" lvl="0" marL="0" marR="0" rtl="0" algn="ctr">
+            <a:pPr marL="0" marR="0" lvl="0" indent="0" algn="ctr" rtl="0">
               <a:lnSpc>
                 <a:spcPct val="95294"/>
               </a:lnSpc>
@@ -9563,35 +9761,86 @@
                 <a:spcPts val="0"/>
               </a:spcAft>
               <a:buClr>
-                <a:srgbClr val="1B2B2E"/>
-              </a:buClr>
-              <a:buSzPts val="2700"/>
+                <a:srgbClr val="1b2b2e"/>
+              </a:buClr>
+              <a:buSzPct val="25000"/>
               <a:buFont typeface="Noto Sans"/>
               <a:buNone/>
-            </a:pPr>
-            <a:r>
-              <a:rPr b="1" i="0" lang="en-US" sz="2700" u="none" cap="none" strike="noStrike">
+              <a:defRPr/>
+            </a:pPr>
+            <a:r>
+              <a:rPr lang="en-US" altLang="ko-KR" sz="2700" b="1" i="0" u="none" strike="noStrike" cap="none">
                 <a:solidFill>
-                  <a:srgbClr val="1B2B2E"/>
+                  <a:srgbClr val="1b2b2e"/>
                 </a:solidFill>
                 <a:highlight>
-                  <a:srgbClr val="DCECEC"/>
+                  <a:srgbClr val="dcecec"/>
                 </a:highlight>
                 <a:latin typeface="Noto Sans"/>
                 <a:ea typeface="Noto Sans"/>
                 <a:cs typeface="Noto Sans"/>
                 <a:sym typeface="Noto Sans"/>
               </a:rPr>
-              <a:t>UCI WESAD</a:t>
-            </a:r>
-            <a:endParaRPr b="0" i="0" sz="2700" u="none" cap="none" strike="noStrike">
-              <a:solidFill>
-                <a:schemeClr val="dk1"/>
-              </a:solidFill>
-              <a:latin typeface="Calibri"/>
-              <a:ea typeface="Calibri"/>
-              <a:cs typeface="Calibri"/>
-              <a:sym typeface="Calibri"/>
+              <a:t>PMData</a:t>
+            </a:r>
+            <a:endParaRPr lang="en-US" altLang="ko-KR" sz="2700" b="1" i="0" u="none" strike="noStrike" cap="none">
+              <a:solidFill>
+                <a:srgbClr val="1b2b2e"/>
+              </a:solidFill>
+              <a:highlight>
+                <a:srgbClr val="dcecec"/>
+              </a:highlight>
+              <a:latin typeface="Noto Sans"/>
+              <a:ea typeface="Noto Sans"/>
+              <a:cs typeface="Noto Sans"/>
+              <a:sym typeface="Noto Sans"/>
+            </a:endParaRPr>
+          </a:p>
+          <a:p>
+            <a:pPr marL="0" marR="0" lvl="0" indent="0" algn="ctr" rtl="0">
+              <a:lnSpc>
+                <a:spcPct val="95294"/>
+              </a:lnSpc>
+              <a:spcBef>
+                <a:spcPts val="0"/>
+              </a:spcBef>
+              <a:spcAft>
+                <a:spcPts val="0"/>
+              </a:spcAft>
+              <a:buClr>
+                <a:srgbClr val="1b2b2e"/>
+              </a:buClr>
+              <a:buSzPct val="25000"/>
+              <a:buFont typeface="Noto Sans"/>
+              <a:buNone/>
+              <a:defRPr/>
+            </a:pPr>
+            <a:r>
+              <a:rPr lang="en-US" altLang="ko-KR" sz="2700" b="1" i="0" u="none" strike="noStrike" cap="none">
+                <a:solidFill>
+                  <a:srgbClr val="1b2b2e"/>
+                </a:solidFill>
+                <a:highlight>
+                  <a:srgbClr val="dcecec"/>
+                </a:highlight>
+                <a:latin typeface="Noto Sans"/>
+                <a:ea typeface="Noto Sans"/>
+                <a:cs typeface="Noto Sans"/>
+                <a:sym typeface="Noto Sans"/>
+              </a:rPr>
+              <a:t>(SimulaMet)</a:t>
+            </a:r>
+            <a:endParaRPr lang="en-US" altLang="ko-KR" sz="2700" b="1" i="0" u="none" strike="noStrike" cap="none">
+              <a:solidFill>
+                <a:srgbClr val="1b2b2e"/>
+              </a:solidFill>
+              <a:highlight>
+                <a:srgbClr val="dcecec"/>
+              </a:highlight>
+              <a:latin typeface="Noto Sans"/>
+              <a:ea typeface="Noto Sans"/>
+              <a:cs typeface="Noto Sans"/>
+              <a:sym typeface="Noto Sans"/>
             </a:endParaRPr>
           </a:p>
         </p:txBody>
@@ -9604,7 +9853,7 @@
         </p:nvSpPr>
         <p:spPr>
           <a:xfrm>
-            <a:off x="1514475" y="4533900"/>
+            <a:off x="3651494" y="4424362"/>
             <a:ext cx="4166196" cy="1438275"/>
           </a:xfrm>
           <a:prstGeom prst="rect">
@@ -9616,12 +9865,12 @@
           </a:ln>
         </p:spPr>
         <p:txBody>
-          <a:bodyPr anchorCtr="0" anchor="t" bIns="25400" lIns="25400" spcFirstLastPara="1" rIns="25400" wrap="square" tIns="25400">
-            <a:normAutofit/>
-          </a:bodyPr>
-          <a:lstStyle/>
-          <a:p>
-            <a:pPr indent="0" lvl="0" marL="0" marR="0" rtl="0" algn="l">
+          <a:bodyPr wrap="square" lIns="25400" tIns="25400" rIns="25400" bIns="25400" anchor="t" anchorCtr="0">
+            <a:normAutofit lnSpcReduction="10000"/>
+          </a:bodyPr>
+          <a:lstStyle/>
+          <a:p>
+            <a:pPr marL="0" marR="0" lvl="0" indent="0" algn="l" rtl="0">
               <a:lnSpc>
                 <a:spcPct val="129729"/>
               </a:lnSpc>
@@ -9632,16 +9881,17 @@
                 <a:spcPts val="0"/>
               </a:spcAft>
               <a:buClr>
-                <a:srgbClr val="2C7A73"/>
-              </a:buClr>
-              <a:buSzPts val="2400"/>
+                <a:srgbClr val="2c7a73"/>
+              </a:buClr>
+              <a:buSzPct val="25000"/>
               <a:buFont typeface="Noto Sans"/>
               <a:buNone/>
-            </a:pPr>
-            <a:r>
-              <a:rPr b="1" i="0" lang="en-US" sz="2400" u="none" cap="none" strike="noStrike">
+              <a:defRPr/>
+            </a:pPr>
+            <a:r>
+              <a:rPr lang="en-US" sz="2400" b="1" i="0" u="none" strike="noStrike" cap="none">
                 <a:solidFill>
-                  <a:srgbClr val="2C7A73"/>
+                  <a:srgbClr val="2c7a73"/>
                 </a:solidFill>
                 <a:latin typeface="Noto Sans"/>
                 <a:ea typeface="Noto Sans"/>
@@ -9651,25 +9901,109 @@
               <a:t>Source: </a:t>
             </a:r>
             <a:r>
-              <a:rPr b="0" i="0" lang="en-US" sz="2400" u="none" cap="none" strike="noStrike">
+              <a:rPr lang="en-US" altLang="ko-KR" sz="2400" b="0" i="0" u="none" strike="noStrike" cap="none">
                 <a:solidFill>
-                  <a:srgbClr val="1B2B2E"/>
+                  <a:srgbClr val="1b2b2e"/>
                 </a:solidFill>
                 <a:latin typeface="Noto Sans"/>
                 <a:ea typeface="Noto Sans"/>
                 <a:cs typeface="Noto Sans"/>
                 <a:sym typeface="Noto Sans"/>
               </a:rPr>
-              <a:t>손목/흉부 웨어러블 생체신호 (심박, 호흡, 체온 등) 및 정서 라벨</a:t>
-            </a:r>
-            <a:endParaRPr b="0" i="0" sz="2400" u="none" cap="none" strike="noStrike">
-              <a:solidFill>
-                <a:schemeClr val="dk1"/>
-              </a:solidFill>
-              <a:latin typeface="Calibri"/>
-              <a:ea typeface="Calibri"/>
-              <a:cs typeface="Calibri"/>
-              <a:sym typeface="Calibri"/>
+              <a:t>Fitbit</a:t>
+            </a:r>
+            <a:r>
+              <a:rPr lang="ko-KR" altLang="en-US" sz="2400" b="0" i="0" u="none" strike="noStrike" cap="none">
+                <a:solidFill>
+                  <a:srgbClr val="1b2b2e"/>
+                </a:solidFill>
+                <a:latin typeface="Noto Sans"/>
+                <a:ea typeface="Noto Sans"/>
+                <a:cs typeface="Noto Sans"/>
+                <a:sym typeface="Noto Sans"/>
+              </a:rPr>
+              <a:t> 기반 일상 라이프로그 </a:t>
+            </a:r>
+            <a:r>
+              <a:rPr lang="en-US" altLang="ko-KR" sz="2400" b="0" i="0" u="none" strike="noStrike" cap="none">
+                <a:solidFill>
+                  <a:srgbClr val="1b2b2e"/>
+                </a:solidFill>
+                <a:latin typeface="Noto Sans"/>
+                <a:ea typeface="Noto Sans"/>
+                <a:cs typeface="Noto Sans"/>
+                <a:sym typeface="Noto Sans"/>
+              </a:rPr>
+              <a:t>-</a:t>
+            </a:r>
+            <a:r>
+              <a:rPr lang="ko-KR" altLang="en-US" sz="2400" b="0" i="0" u="none" strike="noStrike" cap="none">
+                <a:solidFill>
+                  <a:srgbClr val="1b2b2e"/>
+                </a:solidFill>
+                <a:latin typeface="Noto Sans"/>
+                <a:ea typeface="Noto Sans"/>
+                <a:cs typeface="Noto Sans"/>
+                <a:sym typeface="Noto Sans"/>
+              </a:rPr>
+              <a:t> 수면 단계</a:t>
+            </a:r>
+            <a:r>
+              <a:rPr lang="en-US" altLang="ko-KR" sz="2400" b="0" i="0" u="none" strike="noStrike" cap="none">
+                <a:solidFill>
+                  <a:srgbClr val="1b2b2e"/>
+                </a:solidFill>
+                <a:latin typeface="Noto Sans"/>
+                <a:ea typeface="Noto Sans"/>
+                <a:cs typeface="Noto Sans"/>
+                <a:sym typeface="Noto Sans"/>
+              </a:rPr>
+              <a:t>,</a:t>
+            </a:r>
+            <a:r>
+              <a:rPr lang="ko-KR" altLang="en-US" sz="2400" b="0" i="0" u="none" strike="noStrike" cap="none">
+                <a:solidFill>
+                  <a:srgbClr val="1b2b2e"/>
+                </a:solidFill>
+                <a:latin typeface="Noto Sans"/>
+                <a:ea typeface="Noto Sans"/>
+                <a:cs typeface="Noto Sans"/>
+                <a:sym typeface="Noto Sans"/>
+              </a:rPr>
+              <a:t> 분 단위 심박수</a:t>
+            </a:r>
+            <a:r>
+              <a:rPr lang="en-US" altLang="ko-KR" sz="2400" b="0" i="0" u="none" strike="noStrike" cap="none">
+                <a:solidFill>
+                  <a:srgbClr val="1b2b2e"/>
+                </a:solidFill>
+                <a:latin typeface="Noto Sans"/>
+                <a:ea typeface="Noto Sans"/>
+                <a:cs typeface="Noto Sans"/>
+                <a:sym typeface="Noto Sans"/>
+              </a:rPr>
+              <a:t>,</a:t>
+            </a:r>
+            <a:r>
+              <a:rPr lang="ko-KR" altLang="en-US" sz="2400" b="0" i="0" u="none" strike="noStrike" cap="none">
+                <a:solidFill>
+                  <a:srgbClr val="1b2b2e"/>
+                </a:solidFill>
+                <a:latin typeface="Noto Sans"/>
+                <a:ea typeface="Noto Sans"/>
+                <a:cs typeface="Noto Sans"/>
+                <a:sym typeface="Noto Sans"/>
+              </a:rPr>
+              <a:t> 걸음 수</a:t>
+            </a:r>
+            <a:endParaRPr lang="ko-KR" altLang="en-US" sz="2400" b="0" i="0" u="none" strike="noStrike" cap="none">
+              <a:solidFill>
+                <a:srgbClr val="1b2b2e"/>
+              </a:solidFill>
+              <a:latin typeface="Noto Sans"/>
+              <a:ea typeface="Noto Sans"/>
+              <a:cs typeface="Noto Sans"/>
+              <a:sym typeface="Noto Sans"/>
             </a:endParaRPr>
           </a:p>
         </p:txBody>
@@ -9682,8 +10016,8 @@
         </p:nvSpPr>
         <p:spPr>
           <a:xfrm>
-            <a:off x="1514475" y="6248400"/>
-            <a:ext cx="4166196" cy="1438275"/>
+            <a:off x="3651494" y="6138862"/>
+            <a:ext cx="4166196" cy="2464044"/>
           </a:xfrm>
           <a:prstGeom prst="rect">
             <a:avLst/>
@@ -9694,12 +10028,12 @@
           </a:ln>
         </p:spPr>
         <p:txBody>
-          <a:bodyPr anchorCtr="0" anchor="t" bIns="25400" lIns="25400" spcFirstLastPara="1" rIns="25400" wrap="square" tIns="25400">
-            <a:normAutofit/>
-          </a:bodyPr>
-          <a:lstStyle/>
-          <a:p>
-            <a:pPr indent="0" lvl="0" marL="0" marR="0" rtl="0" algn="l">
+          <a:bodyPr wrap="square" lIns="25400" tIns="25400" rIns="25400" bIns="25400" anchor="t" anchorCtr="0">
+            <a:normAutofit lnSpcReduction="10000"/>
+          </a:bodyPr>
+          <a:lstStyle/>
+          <a:p>
+            <a:pPr marL="0" marR="0" lvl="0" indent="0" algn="l" rtl="0">
               <a:lnSpc>
                 <a:spcPct val="129729"/>
               </a:lnSpc>
@@ -9710,16 +10044,17 @@
                 <a:spcPts val="0"/>
               </a:spcAft>
               <a:buClr>
-                <a:srgbClr val="2C7A73"/>
-              </a:buClr>
-              <a:buSzPts val="2400"/>
+                <a:srgbClr val="2c7a73"/>
+              </a:buClr>
+              <a:buSzPct val="25000"/>
               <a:buFont typeface="Noto Sans"/>
               <a:buNone/>
-            </a:pPr>
-            <a:r>
-              <a:rPr b="1" i="0" lang="en-US" sz="2400" u="none" cap="none" strike="noStrike">
+              <a:defRPr/>
+            </a:pPr>
+            <a:r>
+              <a:rPr lang="en-US" sz="2400" b="1" i="0" u="none" strike="noStrike" cap="none">
                 <a:solidFill>
-                  <a:srgbClr val="2C7A73"/>
+                  <a:srgbClr val="2c7a73"/>
                 </a:solidFill>
                 <a:latin typeface="Noto Sans"/>
                 <a:ea typeface="Noto Sans"/>
@@ -9729,63 +10064,237 @@
               <a:t>Use: </a:t>
             </a:r>
             <a:r>
-              <a:rPr b="0" i="0" lang="en-US" sz="2400" u="none" cap="none" strike="noStrike">
+              <a:rPr lang="ko-KR" altLang="en-US" sz="2400" b="0" i="0" u="none" strike="noStrike" cap="none">
                 <a:solidFill>
-                  <a:srgbClr val="1B2B2E"/>
+                  <a:srgbClr val="1b2b2e"/>
                 </a:solidFill>
                 <a:latin typeface="Noto Sans"/>
                 <a:ea typeface="Noto Sans"/>
                 <a:cs typeface="Noto Sans"/>
                 <a:sym typeface="Noto Sans"/>
               </a:rPr>
-              <a:t>즉시 확보하여 초기 스트레스 이진 분류(최대 93% 정확도) 학습에 활용</a:t>
-            </a:r>
-            <a:endParaRPr b="0" i="0" sz="2400" u="none" cap="none" strike="noStrike">
-              <a:solidFill>
-                <a:schemeClr val="dk1"/>
-              </a:solidFill>
-              <a:latin typeface="Calibri"/>
-              <a:ea typeface="Calibri"/>
-              <a:cs typeface="Calibri"/>
-              <a:sym typeface="Calibri"/>
-            </a:endParaRPr>
-          </a:p>
-        </p:txBody>
-      </p:sp>
-      <p:sp>
-        <p:nvSpPr>
-          <p:cNvPr id="414" name="Google Shape;414;p12"/>
-          <p:cNvSpPr/>
-          <p:nvPr/>
-        </p:nvSpPr>
-        <p:spPr>
-          <a:xfrm>
-            <a:off x="6654701" y="1968500"/>
-            <a:ext cx="4978450" cy="7162800"/>
+              <a:t>라벨 없는 정상 패턴 시계열로 </a:t>
+            </a:r>
+            <a:r>
+              <a:rPr lang="en-US" altLang="ko-KR" sz="2400" b="0" i="0" u="none" strike="noStrike" cap="none">
+                <a:solidFill>
+                  <a:srgbClr val="1b2b2e"/>
+                </a:solidFill>
+                <a:latin typeface="Noto Sans"/>
+                <a:ea typeface="Noto Sans"/>
+                <a:cs typeface="Noto Sans"/>
+                <a:sym typeface="Noto Sans"/>
+              </a:rPr>
+              <a:t>LSTM  Autoencoder</a:t>
+            </a:r>
+            <a:r>
+              <a:rPr lang="ko-KR" altLang="en-US" sz="2400" b="0" i="0" u="none" strike="noStrike" cap="none">
+                <a:solidFill>
+                  <a:srgbClr val="1b2b2e"/>
+                </a:solidFill>
+                <a:latin typeface="Noto Sans"/>
+                <a:ea typeface="Noto Sans"/>
+                <a:cs typeface="Noto Sans"/>
+                <a:sym typeface="Noto Sans"/>
+              </a:rPr>
+              <a:t> 비지도 학습</a:t>
+            </a:r>
+            <a:r>
+              <a:rPr lang="en-US" altLang="ko-KR" sz="2400" b="0" i="0" u="none" strike="noStrike" cap="none">
+                <a:solidFill>
+                  <a:srgbClr val="1b2b2e"/>
+                </a:solidFill>
+                <a:latin typeface="Noto Sans"/>
+                <a:ea typeface="Noto Sans"/>
+                <a:cs typeface="Noto Sans"/>
+                <a:sym typeface="Noto Sans"/>
+              </a:rPr>
+              <a:t>,</a:t>
+            </a:r>
+            <a:r>
+              <a:rPr lang="ko-KR" altLang="en-US" sz="2400" b="0" i="0" u="none" strike="noStrike" cap="none">
+                <a:solidFill>
+                  <a:srgbClr val="1b2b2e"/>
+                </a:solidFill>
+                <a:latin typeface="Noto Sans"/>
+                <a:ea typeface="Noto Sans"/>
+                <a:cs typeface="Noto Sans"/>
+                <a:sym typeface="Noto Sans"/>
+              </a:rPr>
+              <a:t> 재구성 오차 기반 이상 탐지</a:t>
+            </a:r>
+            <a:endParaRPr lang="ko-KR" altLang="en-US" sz="2400" b="0" i="0" u="none" strike="noStrike" cap="none">
+              <a:solidFill>
+                <a:srgbClr val="1b2b2e"/>
+              </a:solidFill>
+              <a:latin typeface="Noto Sans"/>
+              <a:ea typeface="Noto Sans"/>
+              <a:cs typeface="Noto Sans"/>
+              <a:sym typeface="Noto Sans"/>
+            </a:endParaRPr>
+          </a:p>
+        </p:txBody>
+      </p:sp>
+      <p:sp>
+        <p:nvSpPr>
+          <p:cNvPr id="428" name="Google Shape;428;p12"/>
+          <p:cNvSpPr/>
+          <p:nvPr/>
+        </p:nvSpPr>
+        <p:spPr>
+          <a:xfrm>
+            <a:off x="1054100" y="635000"/>
+            <a:ext cx="76200" cy="482600"/>
+          </a:xfrm>
+          <a:prstGeom prst="rect">
+            <a:avLst/>
+          </a:prstGeom>
+          <a:solidFill>
+            <a:srgbClr val="2C7A73"/>
+          </a:solidFill>
+          <a:ln>
+            <a:noFill/>
+          </a:ln>
+        </p:spPr>
+        <p:txBody>
+          <a:bodyPr anchorCtr="0" anchor="t" bIns="45700" lIns="91425" spcFirstLastPara="1" rIns="91425" wrap="square" tIns="45700">
+            <a:noAutofit/>
+          </a:bodyPr>
+          <a:lstStyle/>
+          <a:p>
+            <a:pPr indent="0" lvl="0" marL="0" marR="0" rtl="0" algn="l">
+              <a:lnSpc>
+                <a:spcPct val="100000"/>
+              </a:lnSpc>
+              <a:spcBef>
+                <a:spcPts val="0"/>
+              </a:spcBef>
+              <a:spcAft>
+                <a:spcPts val="0"/>
+              </a:spcAft>
+              <a:buClr>
+                <a:srgbClr val="000000"/>
+              </a:buClr>
+              <a:buSzPts val="1800"/>
+              <a:buFont typeface="Arial"/>
+              <a:buNone/>
+            </a:pPr>
+            <a:r>
+              <a:t/>
+            </a:r>
+            <a:endParaRPr b="0" i="0" sz="1800" u="none" cap="none" strike="noStrike">
+              <a:solidFill>
+                <a:schemeClr val="lt1"/>
+              </a:solidFill>
+              <a:latin typeface="Calibri"/>
+              <a:ea typeface="Calibri"/>
+              <a:cs typeface="Calibri"/>
+              <a:sym typeface="Calibri"/>
+            </a:endParaRPr>
+          </a:p>
+        </p:txBody>
+      </p:sp>
+      <p:sp>
+        <p:nvSpPr>
+          <p:cNvPr id="429" name="Google Shape;429;p12"/>
+          <p:cNvSpPr txBox="1"/>
+          <p:nvPr/>
+        </p:nvSpPr>
+        <p:spPr>
+          <a:xfrm>
+            <a:off x="1282700" y="508000"/>
+            <a:ext cx="14605000" cy="685800"/>
+          </a:xfrm>
+          <a:prstGeom prst="rect">
+            <a:avLst/>
+          </a:prstGeom>
+          <a:noFill/>
+          <a:ln>
+            <a:noFill/>
+          </a:ln>
+        </p:spPr>
+        <p:txBody>
+          <a:bodyPr wrap="square" lIns="91425" tIns="45700" rIns="91425" bIns="45700" anchor="ctr" anchorCtr="0">
+            <a:noAutofit/>
+          </a:bodyPr>
+          <a:lstStyle/>
+          <a:p>
+            <a:pPr marL="0" marR="0" lvl="0" indent="0" algn="l" rtl="0">
+              <a:lnSpc>
+                <a:spcPct val="100000"/>
+              </a:lnSpc>
+              <a:spcBef>
+                <a:spcPts val="0"/>
+              </a:spcBef>
+              <a:spcAft>
+                <a:spcPts val="0"/>
+              </a:spcAft>
+              <a:buClr>
+                <a:srgbClr val="000000"/>
+              </a:buClr>
+              <a:buSzPct val="25000"/>
+              <a:buFont typeface="Arial"/>
+              <a:buNone/>
+              <a:defRPr/>
+            </a:pPr>
+            <a:r>
+              <a:rPr lang="en-US" sz="3000" b="1" i="0" u="none" strike="noStrike" cap="none">
+                <a:solidFill>
+                  <a:srgbClr val="1b2b2e"/>
+                </a:solidFill>
+                <a:latin typeface="Noto Sans"/>
+                <a:ea typeface="Noto Sans"/>
+                <a:cs typeface="Noto Sans"/>
+                <a:sym typeface="Noto Sans"/>
+              </a:rPr>
+              <a:t>학습 데이터셋 확보 계획</a:t>
+            </a:r>
+            <a:endParaRPr sz="1400" b="0" i="0" u="none" strike="noStrike" cap="none">
+              <a:solidFill>
+                <a:srgbClr val="000000"/>
+              </a:solidFill>
+              <a:latin typeface="Arial"/>
+              <a:ea typeface="Arial"/>
+              <a:cs typeface="Arial"/>
+              <a:sym typeface="Arial"/>
+            </a:endParaRPr>
+          </a:p>
+        </p:txBody>
+      </p:sp>
+      <p:sp>
+        <p:nvSpPr>
+          <p:cNvPr id="430" name="Google Shape;407;p12"/>
+          <p:cNvSpPr/>
+          <p:nvPr/>
+        </p:nvSpPr>
+        <p:spPr>
+          <a:xfrm>
+            <a:off x="9632461" y="1858962"/>
+            <a:ext cx="4978301" cy="7162800"/>
           </a:xfrm>
           <a:prstGeom prst="roundRect">
             <a:avLst>
-              <a:gd fmla="val 8418" name="adj"/>
+              <a:gd name="adj" fmla="val 8419"/>
             </a:avLst>
           </a:prstGeom>
           <a:noFill/>
-          <a:ln cap="flat" cmpd="sng" w="47625">
+          <a:ln w="47625" cap="flat" cmpd="sng">
             <a:solidFill>
-              <a:srgbClr val="8EC3C4"/>
+              <a:srgbClr val="8ec3c4"/>
             </a:solidFill>
             <a:prstDash val="solid"/>
             <a:round/>
-            <a:headEnd len="sm" w="sm" type="none"/>
-            <a:tailEnd len="sm" w="sm" type="none"/>
-          </a:ln>
-        </p:spPr>
-        <p:txBody>
-          <a:bodyPr anchorCtr="0" anchor="t" bIns="45700" lIns="91425" spcFirstLastPara="1" rIns="91425" wrap="square" tIns="45700">
+            <a:headEnd w="sm" len="sm"/>
+            <a:tailEnd w="sm" len="sm"/>
+          </a:ln>
+        </p:spPr>
+        <p:txBody>
+          <a:bodyPr wrap="square" lIns="91425" tIns="45700" rIns="91425" bIns="45700" anchor="t" anchorCtr="0">
             <a:noAutofit/>
           </a:bodyPr>
           <a:lstStyle/>
           <a:p>
-            <a:pPr indent="0" lvl="0" marL="0" marR="0" rtl="0" algn="l">
+            <a:pPr marL="0" marR="0" lvl="0" indent="0" algn="l" rtl="0">
               <a:lnSpc>
                 <a:spcPct val="100000"/>
               </a:lnSpc>
@@ -9798,55 +10307,53 @@
               <a:buClr>
                 <a:srgbClr val="000000"/>
               </a:buClr>
-              <a:buSzPts val="1800"/>
+              <a:buSzPct val="25000"/>
               <a:buFont typeface="Arial"/>
               <a:buNone/>
-            </a:pPr>
-            <a:r>
-              <a:t/>
-            </a:r>
-            <a:endParaRPr b="0" i="0" sz="1800" u="none" cap="none" strike="noStrike">
-              <a:solidFill>
-                <a:schemeClr val="dk1"/>
-              </a:solidFill>
-              <a:latin typeface="Calibri"/>
-              <a:ea typeface="Calibri"/>
-              <a:cs typeface="Calibri"/>
-              <a:sym typeface="Calibri"/>
-            </a:endParaRPr>
-          </a:p>
-        </p:txBody>
-      </p:sp>
-      <p:sp>
-        <p:nvSpPr>
-          <p:cNvPr id="415" name="Google Shape;415;p12"/>
-          <p:cNvSpPr/>
-          <p:nvPr/>
-        </p:nvSpPr>
-        <p:spPr>
-          <a:xfrm>
-            <a:off x="8686651" y="1524000"/>
+              <a:defRPr/>
+            </a:pPr>
+            <a:endParaRPr sz="1800" b="0" i="0" u="none" strike="noStrike" cap="none">
+              <a:solidFill>
+                <a:schemeClr val="dk1"/>
+              </a:solidFill>
+              <a:latin typeface="Calibri"/>
+              <a:ea typeface="Calibri"/>
+              <a:cs typeface="Calibri"/>
+              <a:sym typeface="Calibri"/>
+            </a:endParaRPr>
+          </a:p>
+        </p:txBody>
+      </p:sp>
+      <p:sp>
+        <p:nvSpPr>
+          <p:cNvPr id="431" name="Google Shape;408;p12"/>
+          <p:cNvSpPr/>
+          <p:nvPr/>
+        </p:nvSpPr>
+        <p:spPr>
+          <a:xfrm>
+            <a:off x="11667097" y="1424781"/>
             <a:ext cx="914400" cy="914400"/>
           </a:xfrm>
           <a:prstGeom prst="roundRect">
             <a:avLst>
-              <a:gd fmla="val 18750" name="adj"/>
+              <a:gd name="adj" fmla="val 18750"/>
             </a:avLst>
           </a:prstGeom>
           <a:solidFill>
-            <a:srgbClr val="9ED3D0"/>
+            <a:srgbClr val="9ed3d0"/>
           </a:solidFill>
           <a:ln>
             <a:noFill/>
           </a:ln>
         </p:spPr>
         <p:txBody>
-          <a:bodyPr anchorCtr="0" anchor="t" bIns="45700" lIns="91425" spcFirstLastPara="1" rIns="91425" wrap="square" tIns="45700">
+          <a:bodyPr wrap="square" lIns="91425" tIns="45700" rIns="91425" bIns="45700" anchor="t" anchorCtr="0">
             <a:noAutofit/>
           </a:bodyPr>
           <a:lstStyle/>
           <a:p>
-            <a:pPr indent="0" lvl="0" marL="0" marR="0" rtl="0" algn="l">
+            <a:pPr marL="0" marR="0" lvl="0" indent="0" algn="l" rtl="0">
               <a:lnSpc>
                 <a:spcPct val="100000"/>
               </a:lnSpc>
@@ -9859,55 +10366,53 @@
               <a:buClr>
                 <a:srgbClr val="000000"/>
               </a:buClr>
-              <a:buSzPts val="1800"/>
+              <a:buSzPct val="25000"/>
               <a:buFont typeface="Arial"/>
               <a:buNone/>
-            </a:pPr>
-            <a:r>
-              <a:t/>
-            </a:r>
-            <a:endParaRPr b="0" i="0" sz="1800" u="none" cap="none" strike="noStrike">
-              <a:solidFill>
-                <a:schemeClr val="dk1"/>
-              </a:solidFill>
-              <a:latin typeface="Calibri"/>
-              <a:ea typeface="Calibri"/>
-              <a:cs typeface="Calibri"/>
-              <a:sym typeface="Calibri"/>
-            </a:endParaRPr>
-          </a:p>
-        </p:txBody>
-      </p:sp>
-      <p:sp>
-        <p:nvSpPr>
-          <p:cNvPr id="416" name="Google Shape;416;p12"/>
-          <p:cNvSpPr/>
-          <p:nvPr/>
-        </p:nvSpPr>
-        <p:spPr>
-          <a:xfrm>
-            <a:off x="9020026" y="1816100"/>
+              <a:defRPr/>
+            </a:pPr>
+            <a:endParaRPr sz="1800" b="0" i="0" u="none" strike="noStrike" cap="none">
+              <a:solidFill>
+                <a:schemeClr val="dk1"/>
+              </a:solidFill>
+              <a:latin typeface="Calibri"/>
+              <a:ea typeface="Calibri"/>
+              <a:cs typeface="Calibri"/>
+              <a:sym typeface="Calibri"/>
+            </a:endParaRPr>
+          </a:p>
+        </p:txBody>
+      </p:sp>
+      <p:sp>
+        <p:nvSpPr>
+          <p:cNvPr id="432" name="Google Shape;409;p12"/>
+          <p:cNvSpPr/>
+          <p:nvPr/>
+        </p:nvSpPr>
+        <p:spPr>
+          <a:xfrm>
+            <a:off x="11997787" y="1706562"/>
             <a:ext cx="247650" cy="323850"/>
           </a:xfrm>
           <a:prstGeom prst="roundRect">
             <a:avLst>
-              <a:gd fmla="val 23077" name="adj"/>
+              <a:gd name="adj" fmla="val 23077"/>
             </a:avLst>
           </a:prstGeom>
           <a:solidFill>
-            <a:srgbClr val="FFFFFF"/>
+            <a:srgbClr val="ffffff"/>
           </a:solidFill>
           <a:ln>
             <a:noFill/>
           </a:ln>
         </p:spPr>
         <p:txBody>
-          <a:bodyPr anchorCtr="0" anchor="t" bIns="45700" lIns="91425" spcFirstLastPara="1" rIns="91425" wrap="square" tIns="45700">
+          <a:bodyPr wrap="square" lIns="91425" tIns="45700" rIns="91425" bIns="45700" anchor="t" anchorCtr="0">
             <a:noAutofit/>
           </a:bodyPr>
           <a:lstStyle/>
           <a:p>
-            <a:pPr indent="0" lvl="0" marL="0" marR="0" rtl="0" algn="l">
+            <a:pPr marL="0" marR="0" lvl="0" indent="0" algn="l" rtl="0">
               <a:lnSpc>
                 <a:spcPct val="100000"/>
               </a:lnSpc>
@@ -9920,55 +10425,53 @@
               <a:buClr>
                 <a:srgbClr val="000000"/>
               </a:buClr>
-              <a:buSzPts val="1800"/>
+              <a:buSzPct val="25000"/>
               <a:buFont typeface="Arial"/>
               <a:buNone/>
-            </a:pPr>
-            <a:r>
-              <a:t/>
-            </a:r>
-            <a:endParaRPr b="0" i="0" sz="1800" u="none" cap="none" strike="noStrike">
-              <a:solidFill>
-                <a:schemeClr val="dk1"/>
-              </a:solidFill>
-              <a:latin typeface="Calibri"/>
-              <a:ea typeface="Calibri"/>
-              <a:cs typeface="Calibri"/>
-              <a:sym typeface="Calibri"/>
-            </a:endParaRPr>
-          </a:p>
-        </p:txBody>
-      </p:sp>
-      <p:sp>
-        <p:nvSpPr>
-          <p:cNvPr id="417" name="Google Shape;417;p12"/>
-          <p:cNvSpPr/>
-          <p:nvPr/>
-        </p:nvSpPr>
-        <p:spPr>
-          <a:xfrm>
-            <a:off x="7121425" y="2679700"/>
-            <a:ext cx="4044900" cy="1421100"/>
+              <a:defRPr/>
+            </a:pPr>
+            <a:endParaRPr sz="1800" b="0" i="0" u="none" strike="noStrike" cap="none">
+              <a:solidFill>
+                <a:schemeClr val="dk1"/>
+              </a:solidFill>
+              <a:latin typeface="Calibri"/>
+              <a:ea typeface="Calibri"/>
+              <a:cs typeface="Calibri"/>
+              <a:sym typeface="Calibri"/>
+            </a:endParaRPr>
+          </a:p>
+        </p:txBody>
+      </p:sp>
+      <p:sp>
+        <p:nvSpPr>
+          <p:cNvPr id="433" name="Google Shape;410;p12"/>
+          <p:cNvSpPr/>
+          <p:nvPr/>
+        </p:nvSpPr>
+        <p:spPr>
+          <a:xfrm>
+            <a:off x="10099187" y="2570162"/>
+            <a:ext cx="4044851" cy="1421011"/>
           </a:xfrm>
           <a:prstGeom prst="roundRect">
             <a:avLst>
-              <a:gd fmla="val 50000" name="adj"/>
+              <a:gd name="adj" fmla="val 50000"/>
             </a:avLst>
           </a:prstGeom>
           <a:solidFill>
-            <a:srgbClr val="DCECEC"/>
+            <a:srgbClr val="dcecec"/>
           </a:solidFill>
           <a:ln>
             <a:noFill/>
           </a:ln>
         </p:spPr>
         <p:txBody>
-          <a:bodyPr anchorCtr="0" anchor="t" bIns="45700" lIns="91425" spcFirstLastPara="1" rIns="91425" wrap="square" tIns="45700">
+          <a:bodyPr wrap="square" lIns="91425" tIns="45700" rIns="91425" bIns="45700" anchor="t" anchorCtr="0">
             <a:noAutofit/>
           </a:bodyPr>
           <a:lstStyle/>
           <a:p>
-            <a:pPr indent="0" lvl="0" marL="0" marR="0" rtl="0" algn="l">
+            <a:pPr marL="0" marR="0" lvl="0" indent="0" algn="l" rtl="0">
               <a:lnSpc>
                 <a:spcPct val="100000"/>
               </a:lnSpc>
@@ -9981,35 +10484,33 @@
               <a:buClr>
                 <a:srgbClr val="000000"/>
               </a:buClr>
-              <a:buSzPts val="1800"/>
+              <a:buSzPct val="25000"/>
               <a:buFont typeface="Arial"/>
               <a:buNone/>
-            </a:pPr>
-            <a:r>
-              <a:t/>
-            </a:r>
-            <a:endParaRPr b="0" i="0" sz="1800" u="none" cap="none" strike="noStrike">
-              <a:solidFill>
-                <a:schemeClr val="dk1"/>
-              </a:solidFill>
-              <a:latin typeface="Calibri"/>
-              <a:ea typeface="Calibri"/>
-              <a:cs typeface="Calibri"/>
-              <a:sym typeface="Calibri"/>
-            </a:endParaRPr>
-          </a:p>
-        </p:txBody>
-      </p:sp>
-      <p:sp>
-        <p:nvSpPr>
-          <p:cNvPr id="418" name="Google Shape;418;p12"/>
-          <p:cNvSpPr/>
-          <p:nvPr/>
-        </p:nvSpPr>
-        <p:spPr>
-          <a:xfrm>
-            <a:off x="7251225" y="2958388"/>
-            <a:ext cx="3785400" cy="914400"/>
+              <a:defRPr/>
+            </a:pPr>
+            <a:endParaRPr sz="1800" b="0" i="0" u="none" strike="noStrike" cap="none">
+              <a:solidFill>
+                <a:schemeClr val="dk1"/>
+              </a:solidFill>
+              <a:latin typeface="Calibri"/>
+              <a:ea typeface="Calibri"/>
+              <a:cs typeface="Calibri"/>
+              <a:sym typeface="Calibri"/>
+            </a:endParaRPr>
+          </a:p>
+        </p:txBody>
+      </p:sp>
+      <p:sp>
+        <p:nvSpPr>
+          <p:cNvPr id="434" name="Google Shape;411;p12"/>
+          <p:cNvSpPr/>
+          <p:nvPr/>
+        </p:nvSpPr>
+        <p:spPr>
+          <a:xfrm>
+            <a:off x="10229111" y="2931362"/>
+            <a:ext cx="3785100" cy="910103"/>
           </a:xfrm>
           <a:prstGeom prst="rect">
             <a:avLst/>
@@ -10020,12 +10521,12 @@
           </a:ln>
         </p:spPr>
         <p:txBody>
-          <a:bodyPr anchorCtr="0" anchor="t" bIns="25400" lIns="25400" spcFirstLastPara="1" rIns="25400" wrap="square" tIns="25400">
+          <a:bodyPr wrap="square" lIns="25400" tIns="25400" rIns="25400" bIns="25400" anchor="t" anchorCtr="0">
             <a:normAutofit/>
           </a:bodyPr>
           <a:lstStyle/>
           <a:p>
-            <a:pPr indent="0" lvl="0" marL="0" marR="0" rtl="0" algn="ctr">
+            <a:pPr marL="0" marR="0" lvl="0" indent="0" algn="ctr" rtl="0">
               <a:lnSpc>
                 <a:spcPct val="95294"/>
               </a:lnSpc>
@@ -10036,33 +10537,34 @@
                 <a:spcPts val="0"/>
               </a:spcAft>
               <a:buClr>
-                <a:srgbClr val="1B2B2E"/>
-              </a:buClr>
-              <a:buSzPts val="2700"/>
+                <a:srgbClr val="1b2b2e"/>
+              </a:buClr>
+              <a:buSzPct val="25000"/>
               <a:buFont typeface="Noto Sans"/>
               <a:buNone/>
-            </a:pPr>
-            <a:r>
-              <a:rPr b="1" i="0" lang="en-US" sz="2700" u="none" cap="none" strike="noStrike">
+              <a:defRPr/>
+            </a:pPr>
+            <a:r>
+              <a:rPr lang="en-US" altLang="ko-KR" sz="2700" b="1" i="0" u="none" strike="noStrike" cap="none">
                 <a:solidFill>
-                  <a:srgbClr val="1B2B2E"/>
+                  <a:srgbClr val="1b2b2e"/>
                 </a:solidFill>
                 <a:highlight>
-                  <a:srgbClr val="DCECEC"/>
+                  <a:srgbClr val="dcecec"/>
                 </a:highlight>
                 <a:latin typeface="Noto Sans"/>
                 <a:ea typeface="Noto Sans"/>
                 <a:cs typeface="Noto Sans"/>
                 <a:sym typeface="Noto Sans"/>
               </a:rPr>
-              <a:t>AI Hub</a:t>
-            </a:r>
-            <a:endParaRPr b="1" i="0" sz="2700" u="none" cap="none" strike="noStrike">
-              <a:solidFill>
-                <a:srgbClr val="1B2B2E"/>
+              <a:t>GLOBEM</a:t>
+            </a:r>
+            <a:endParaRPr lang="en-US" altLang="ko-KR" sz="2700" b="1" i="0" u="none" strike="noStrike" cap="none">
+              <a:solidFill>
+                <a:srgbClr val="1b2b2e"/>
               </a:solidFill>
               <a:highlight>
-                <a:srgbClr val="DCECEC"/>
+                <a:srgbClr val="dcecec"/>
               </a:highlight>
               <a:latin typeface="Noto Sans"/>
               <a:ea typeface="Noto Sans"/>
@@ -10071,7 +10573,7 @@
             </a:endParaRPr>
           </a:p>
           <a:p>
-            <a:pPr indent="0" lvl="0" marL="0" marR="0" rtl="0" algn="ctr">
+            <a:pPr marL="0" marR="0" lvl="0" indent="0" algn="ctr" rtl="0">
               <a:lnSpc>
                 <a:spcPct val="95294"/>
               </a:lnSpc>
@@ -10082,49 +10584,53 @@
                 <a:spcPts val="0"/>
               </a:spcAft>
               <a:buClr>
-                <a:srgbClr val="1B2B2E"/>
-              </a:buClr>
-              <a:buSzPts val="2700"/>
+                <a:srgbClr val="1b2b2e"/>
+              </a:buClr>
+              <a:buSzPct val="25000"/>
               <a:buFont typeface="Noto Sans"/>
               <a:buNone/>
-            </a:pPr>
-            <a:r>
-              <a:rPr b="1" i="0" lang="en-US" sz="2700" u="none" cap="none" strike="noStrike">
+              <a:defRPr/>
+            </a:pPr>
+            <a:r>
+              <a:rPr lang="en-US" altLang="ko-KR" sz="2700" b="1" i="0" u="none" strike="noStrike" cap="none">
                 <a:solidFill>
-                  <a:srgbClr val="1B2B2E"/>
+                  <a:srgbClr val="1b2b2e"/>
                 </a:solidFill>
                 <a:highlight>
-                  <a:srgbClr val="DCECEC"/>
+                  <a:srgbClr val="dcecec"/>
                 </a:highlight>
                 <a:latin typeface="Noto Sans"/>
                 <a:ea typeface="Noto Sans"/>
                 <a:cs typeface="Noto Sans"/>
                 <a:sym typeface="Noto Sans"/>
               </a:rPr>
-              <a:t>라이프로그 감정 분류</a:t>
-            </a:r>
-            <a:endParaRPr b="0" i="0" sz="2700" u="none" cap="none" strike="noStrike">
-              <a:solidFill>
-                <a:schemeClr val="dk1"/>
-              </a:solidFill>
-              <a:latin typeface="Calibri"/>
-              <a:ea typeface="Calibri"/>
-              <a:cs typeface="Calibri"/>
-              <a:sym typeface="Calibri"/>
-            </a:endParaRPr>
-          </a:p>
-        </p:txBody>
-      </p:sp>
-      <p:sp>
-        <p:nvSpPr>
-          <p:cNvPr id="419" name="Google Shape;419;p12"/>
-          <p:cNvSpPr/>
-          <p:nvPr/>
-        </p:nvSpPr>
-        <p:spPr>
-          <a:xfrm>
-            <a:off x="7121426" y="4533900"/>
-            <a:ext cx="4166400" cy="1438200"/>
+              <a:t>(Microsoft Research)</a:t>
+            </a:r>
+            <a:endParaRPr lang="en-US" altLang="ko-KR" sz="2700" b="1" i="0" u="none" strike="noStrike" cap="none">
+              <a:solidFill>
+                <a:srgbClr val="1b2b2e"/>
+              </a:solidFill>
+              <a:highlight>
+                <a:srgbClr val="dcecec"/>
+              </a:highlight>
+              <a:latin typeface="Noto Sans"/>
+              <a:ea typeface="Noto Sans"/>
+              <a:cs typeface="Noto Sans"/>
+              <a:sym typeface="Noto Sans"/>
+            </a:endParaRPr>
+          </a:p>
+        </p:txBody>
+      </p:sp>
+      <p:sp>
+        <p:nvSpPr>
+          <p:cNvPr id="435" name="Google Shape;412;p12"/>
+          <p:cNvSpPr/>
+          <p:nvPr/>
+        </p:nvSpPr>
+        <p:spPr>
+          <a:xfrm>
+            <a:off x="10099187" y="4424362"/>
+            <a:ext cx="4166196" cy="1438275"/>
           </a:xfrm>
           <a:prstGeom prst="rect">
             <a:avLst/>
@@ -10135,12 +10641,12 @@
           </a:ln>
         </p:spPr>
         <p:txBody>
-          <a:bodyPr anchorCtr="0" anchor="t" bIns="25400" lIns="25400" spcFirstLastPara="1" rIns="25400" wrap="square" tIns="25400">
-            <a:normAutofit/>
-          </a:bodyPr>
-          <a:lstStyle/>
-          <a:p>
-            <a:pPr indent="0" lvl="0" marL="0" marR="0" rtl="0" algn="l">
+          <a:bodyPr wrap="square" lIns="25400" tIns="25400" rIns="25400" bIns="25400" anchor="t" anchorCtr="0">
+            <a:normAutofit lnSpcReduction="10000"/>
+          </a:bodyPr>
+          <a:lstStyle/>
+          <a:p>
+            <a:pPr marL="0" marR="0" lvl="0" indent="0" algn="l" rtl="0">
               <a:lnSpc>
                 <a:spcPct val="129729"/>
               </a:lnSpc>
@@ -10151,16 +10657,17 @@
                 <a:spcPts val="0"/>
               </a:spcAft>
               <a:buClr>
-                <a:srgbClr val="2C7A73"/>
-              </a:buClr>
-              <a:buSzPts val="2400"/>
+                <a:srgbClr val="2c7a73"/>
+              </a:buClr>
+              <a:buSzPct val="25000"/>
               <a:buFont typeface="Noto Sans"/>
               <a:buNone/>
-            </a:pPr>
-            <a:r>
-              <a:rPr b="1" i="0" lang="en-US" sz="2400" u="none" cap="none" strike="noStrike">
+              <a:defRPr/>
+            </a:pPr>
+            <a:r>
+              <a:rPr lang="en-US" sz="2400" b="1" i="0" u="none" strike="noStrike" cap="none">
                 <a:solidFill>
-                  <a:srgbClr val="2C7A73"/>
+                  <a:srgbClr val="2c7a73"/>
                 </a:solidFill>
                 <a:latin typeface="Noto Sans"/>
                 <a:ea typeface="Noto Sans"/>
@@ -10170,39 +10677,111 @@
               <a:t>Source: </a:t>
             </a:r>
             <a:r>
-              <a:rPr b="0" i="0" lang="en-US" sz="2400" u="none" cap="none" strike="noStrike">
+              <a:rPr lang="en-US" sz="2400" b="0" i="0" u="none" strike="noStrike" cap="none">
                 <a:solidFill>
-                  <a:srgbClr val="1B2B2E"/>
+                  <a:srgbClr val="1b2b2e"/>
                 </a:solidFill>
                 <a:latin typeface="Noto Sans"/>
                 <a:ea typeface="Noto Sans"/>
                 <a:cs typeface="Noto Sans"/>
                 <a:sym typeface="Noto Sans"/>
               </a:rPr>
-              <a:t>웨어러블 피트니스 트래커 활동·수면 데이터 + 자기보고 기분 라벨</a:t>
-            </a:r>
-            <a:endParaRPr b="0" i="0" sz="2400" u="none" cap="none" strike="noStrike">
-              <a:solidFill>
-                <a:schemeClr val="dk1"/>
-              </a:solidFill>
-              <a:latin typeface="Calibri"/>
-              <a:ea typeface="Calibri"/>
-              <a:cs typeface="Calibri"/>
-              <a:sym typeface="Calibri"/>
-            </a:endParaRPr>
-          </a:p>
-        </p:txBody>
-      </p:sp>
-      <p:sp>
-        <p:nvSpPr>
-          <p:cNvPr id="420" name="Google Shape;420;p12"/>
-          <p:cNvSpPr/>
-          <p:nvPr/>
-        </p:nvSpPr>
-        <p:spPr>
-          <a:xfrm>
-            <a:off x="7121401" y="6248438"/>
-            <a:ext cx="4166400" cy="1895400"/>
+              <a:t>손</a:t>
+            </a:r>
+            <a:r>
+              <a:rPr lang="en-US" altLang="ko-KR" sz="2400" b="0" i="0" u="none" strike="noStrike" cap="none">
+                <a:solidFill>
+                  <a:srgbClr val="1b2b2e"/>
+                </a:solidFill>
+                <a:latin typeface="Noto Sans"/>
+                <a:ea typeface="Noto Sans"/>
+                <a:cs typeface="Noto Sans"/>
+                <a:sym typeface="Noto Sans"/>
+              </a:rPr>
+              <a:t>14</a:t>
+            </a:r>
+            <a:r>
+              <a:rPr lang="ko-KR" altLang="en-US" sz="2400" b="0" i="0" u="none" strike="noStrike" cap="none">
+                <a:solidFill>
+                  <a:srgbClr val="1b2b2e"/>
+                </a:solidFill>
+                <a:latin typeface="Noto Sans"/>
+                <a:ea typeface="Noto Sans"/>
+                <a:cs typeface="Noto Sans"/>
+                <a:sym typeface="Noto Sans"/>
+              </a:rPr>
+              <a:t>일 집계 수면·걸음 피처 </a:t>
+            </a:r>
+            <a:r>
+              <a:rPr lang="en-US" altLang="ko-KR" sz="2400" b="0" i="0" u="none" strike="noStrike" cap="none">
+                <a:solidFill>
+                  <a:srgbClr val="1b2b2e"/>
+                </a:solidFill>
+                <a:latin typeface="Noto Sans"/>
+                <a:ea typeface="Noto Sans"/>
+                <a:cs typeface="Noto Sans"/>
+                <a:sym typeface="Noto Sans"/>
+              </a:rPr>
+              <a:t>+</a:t>
+            </a:r>
+            <a:r>
+              <a:rPr lang="ko-KR" altLang="en-US" sz="2400" b="0" i="0" u="none" strike="noStrike" cap="none">
+                <a:solidFill>
+                  <a:srgbClr val="1b2b2e"/>
+                </a:solidFill>
+                <a:latin typeface="Noto Sans"/>
+                <a:ea typeface="Noto Sans"/>
+                <a:cs typeface="Noto Sans"/>
+                <a:sym typeface="Noto Sans"/>
+              </a:rPr>
+              <a:t> </a:t>
+            </a:r>
+            <a:r>
+              <a:rPr lang="en-US" altLang="ko-KR" sz="2400" b="1" i="0" u="none" strike="noStrike" cap="none">
+                <a:solidFill>
+                  <a:srgbClr val="1b2b2e"/>
+                </a:solidFill>
+                <a:latin typeface="Noto Sans"/>
+                <a:ea typeface="Noto Sans"/>
+                <a:cs typeface="Noto Sans"/>
+                <a:sym typeface="Noto Sans"/>
+              </a:rPr>
+              <a:t>BDI-II </a:t>
+            </a:r>
+            <a:r>
+              <a:rPr lang="ko-KR" altLang="en-US" sz="2400" b="1" i="0" u="none" strike="noStrike" cap="none">
+                <a:solidFill>
+                  <a:srgbClr val="1b2b2e"/>
+                </a:solidFill>
+                <a:latin typeface="Noto Sans"/>
+                <a:ea typeface="Noto Sans"/>
+                <a:cs typeface="Noto Sans"/>
+                <a:sym typeface="Noto Sans"/>
+              </a:rPr>
+              <a:t>우울 척도 점수·우울 라벨</a:t>
+            </a:r>
+            <a:endParaRPr lang="ko-KR" altLang="en-US" sz="2400" b="1" i="0" u="none" strike="noStrike" cap="none">
+              <a:solidFill>
+                <a:srgbClr val="1b2b2e"/>
+              </a:solidFill>
+              <a:latin typeface="Noto Sans"/>
+              <a:ea typeface="Noto Sans"/>
+              <a:cs typeface="Noto Sans"/>
+              <a:sym typeface="Noto Sans"/>
+            </a:endParaRPr>
+          </a:p>
+        </p:txBody>
+      </p:sp>
+      <p:sp>
+        <p:nvSpPr>
+          <p:cNvPr id="436" name="Google Shape;413;p12"/>
+          <p:cNvSpPr/>
+          <p:nvPr/>
+        </p:nvSpPr>
+        <p:spPr>
+          <a:xfrm>
+            <a:off x="10099187" y="6138862"/>
+            <a:ext cx="4166196" cy="1438275"/>
           </a:xfrm>
           <a:prstGeom prst="rect">
             <a:avLst/>
@@ -10213,12 +10792,12 @@
           </a:ln>
         </p:spPr>
         <p:txBody>
-          <a:bodyPr anchorCtr="0" anchor="t" bIns="25400" lIns="25400" spcFirstLastPara="1" rIns="25400" wrap="square" tIns="25400">
-            <a:normAutofit/>
-          </a:bodyPr>
-          <a:lstStyle/>
-          <a:p>
-            <a:pPr indent="0" lvl="0" marL="0" marR="0" rtl="0" algn="l">
+          <a:bodyPr wrap="square" lIns="25400" tIns="25400" rIns="25400" bIns="25400" anchor="t" anchorCtr="0">
+            <a:normAutofit lnSpcReduction="10000"/>
+          </a:bodyPr>
+          <a:lstStyle/>
+          <a:p>
+            <a:pPr marL="0" marR="0" lvl="0" indent="0" algn="l" rtl="0">
               <a:lnSpc>
                 <a:spcPct val="129729"/>
               </a:lnSpc>
@@ -10229,16 +10808,17 @@
                 <a:spcPts val="0"/>
               </a:spcAft>
               <a:buClr>
-                <a:srgbClr val="2C7A73"/>
-              </a:buClr>
-              <a:buSzPts val="2400"/>
+                <a:srgbClr val="2c7a73"/>
+              </a:buClr>
+              <a:buSzPct val="25000"/>
               <a:buFont typeface="Noto Sans"/>
               <a:buNone/>
-            </a:pPr>
-            <a:r>
-              <a:rPr b="1" i="0" lang="en-US" sz="2400" u="none" cap="none" strike="noStrike">
+              <a:defRPr/>
+            </a:pPr>
+            <a:r>
+              <a:rPr lang="en-US" sz="2400" b="1" i="0" u="none" strike="noStrike" cap="none">
                 <a:solidFill>
-                  <a:srgbClr val="2C7A73"/>
+                  <a:srgbClr val="2c7a73"/>
                 </a:solidFill>
                 <a:latin typeface="Noto Sans"/>
                 <a:ea typeface="Noto Sans"/>
@@ -10248,681 +10828,85 @@
               <a:t>Use: </a:t>
             </a:r>
             <a:r>
-              <a:rPr b="0" i="0" lang="en-US" sz="2400" u="none" cap="none" strike="noStrike">
+              <a:rPr lang="en-US" altLang="ko-KR" sz="2400" b="0" i="0" u="none" strike="noStrike" cap="none">
                 <a:solidFill>
-                  <a:srgbClr val="1B2B2E"/>
+                  <a:srgbClr val="1b2b2e"/>
                 </a:solidFill>
                 <a:latin typeface="Noto Sans"/>
                 <a:ea typeface="Noto Sans"/>
                 <a:cs typeface="Noto Sans"/>
                 <a:sym typeface="Noto Sans"/>
               </a:rPr>
-              <a:t>라이프로그 이상탐지·위험도 모델학습에 활용. HRV 등 미포함 지표는 Health Connect 실사용자 파일럿에서 추가 수집해 보정 </a:t>
-            </a:r>
-            <a:endParaRPr b="0" i="0" sz="2400" u="none" cap="none" strike="noStrike">
-              <a:solidFill>
-                <a:schemeClr val="dk1"/>
-              </a:solidFill>
-              <a:latin typeface="Calibri"/>
-              <a:ea typeface="Calibri"/>
-              <a:cs typeface="Calibri"/>
-              <a:sym typeface="Calibri"/>
-            </a:endParaRPr>
-          </a:p>
-        </p:txBody>
-      </p:sp>
-      <p:sp>
-        <p:nvSpPr>
-          <p:cNvPr id="421" name="Google Shape;421;p12"/>
-          <p:cNvSpPr/>
-          <p:nvPr/>
-        </p:nvSpPr>
-        <p:spPr>
-          <a:xfrm>
-            <a:off x="12261800" y="1968500"/>
-            <a:ext cx="4978450" cy="7162800"/>
-          </a:xfrm>
-          <a:prstGeom prst="roundRect">
-            <a:avLst>
-              <a:gd fmla="val 8418" name="adj"/>
-            </a:avLst>
-          </a:prstGeom>
-          <a:noFill/>
-          <a:ln cap="flat" cmpd="sng" w="47625">
-            <a:solidFill>
-              <a:srgbClr val="F0665B"/>
-            </a:solidFill>
-            <a:prstDash val="solid"/>
-            <a:round/>
-            <a:headEnd len="sm" w="sm" type="none"/>
-            <a:tailEnd len="sm" w="sm" type="none"/>
-          </a:ln>
-        </p:spPr>
-        <p:txBody>
-          <a:bodyPr anchorCtr="0" anchor="t" bIns="45700" lIns="91425" spcFirstLastPara="1" rIns="91425" wrap="square" tIns="45700">
-            <a:noAutofit/>
-          </a:bodyPr>
-          <a:lstStyle/>
-          <a:p>
-            <a:pPr indent="0" lvl="0" marL="0" marR="0" rtl="0" algn="l">
-              <a:lnSpc>
-                <a:spcPct val="100000"/>
-              </a:lnSpc>
-              <a:spcBef>
-                <a:spcPts val="0"/>
-              </a:spcBef>
-              <a:spcAft>
-                <a:spcPts val="0"/>
-              </a:spcAft>
-              <a:buClr>
-                <a:srgbClr val="000000"/>
-              </a:buClr>
-              <a:buSzPts val="1800"/>
-              <a:buFont typeface="Arial"/>
-              <a:buNone/>
-            </a:pPr>
-            <a:r>
-              <a:t/>
-            </a:r>
-            <a:endParaRPr b="0" i="0" sz="1800" u="none" cap="none" strike="noStrike">
-              <a:solidFill>
-                <a:schemeClr val="dk1"/>
-              </a:solidFill>
-              <a:latin typeface="Calibri"/>
-              <a:ea typeface="Calibri"/>
-              <a:cs typeface="Calibri"/>
-              <a:sym typeface="Calibri"/>
-            </a:endParaRPr>
-          </a:p>
-        </p:txBody>
-      </p:sp>
-      <p:sp>
-        <p:nvSpPr>
-          <p:cNvPr id="422" name="Google Shape;422;p12"/>
-          <p:cNvSpPr/>
-          <p:nvPr/>
-        </p:nvSpPr>
-        <p:spPr>
-          <a:xfrm>
-            <a:off x="14293751" y="1524000"/>
-            <a:ext cx="914400" cy="914400"/>
-          </a:xfrm>
-          <a:prstGeom prst="roundRect">
-            <a:avLst>
-              <a:gd fmla="val 18750" name="adj"/>
-            </a:avLst>
-          </a:prstGeom>
-          <a:solidFill>
-            <a:srgbClr val="F0665B"/>
-          </a:solidFill>
-          <a:ln>
-            <a:noFill/>
-          </a:ln>
-        </p:spPr>
-        <p:txBody>
-          <a:bodyPr anchorCtr="0" anchor="t" bIns="45700" lIns="91425" spcFirstLastPara="1" rIns="91425" wrap="square" tIns="45700">
-            <a:noAutofit/>
-          </a:bodyPr>
-          <a:lstStyle/>
-          <a:p>
-            <a:pPr indent="0" lvl="0" marL="0" marR="0" rtl="0" algn="l">
-              <a:lnSpc>
-                <a:spcPct val="100000"/>
-              </a:lnSpc>
-              <a:spcBef>
-                <a:spcPts val="0"/>
-              </a:spcBef>
-              <a:spcAft>
-                <a:spcPts val="0"/>
-              </a:spcAft>
-              <a:buClr>
-                <a:srgbClr val="000000"/>
-              </a:buClr>
-              <a:buSzPts val="1800"/>
-              <a:buFont typeface="Arial"/>
-              <a:buNone/>
-            </a:pPr>
-            <a:r>
-              <a:t/>
-            </a:r>
-            <a:endParaRPr b="0" i="0" sz="1800" u="none" cap="none" strike="noStrike">
-              <a:solidFill>
-                <a:schemeClr val="dk1"/>
-              </a:solidFill>
-              <a:latin typeface="Calibri"/>
-              <a:ea typeface="Calibri"/>
-              <a:cs typeface="Calibri"/>
-              <a:sym typeface="Calibri"/>
-            </a:endParaRPr>
-          </a:p>
-        </p:txBody>
-      </p:sp>
-      <p:sp>
-        <p:nvSpPr>
-          <p:cNvPr id="423" name="Google Shape;423;p12"/>
-          <p:cNvSpPr/>
-          <p:nvPr/>
-        </p:nvSpPr>
-        <p:spPr>
-          <a:xfrm>
-            <a:off x="14627126" y="1816100"/>
-            <a:ext cx="247650" cy="323850"/>
-          </a:xfrm>
-          <a:prstGeom prst="roundRect">
-            <a:avLst>
-              <a:gd fmla="val 23077" name="adj"/>
-            </a:avLst>
-          </a:prstGeom>
-          <a:solidFill>
-            <a:srgbClr val="FFFFFF"/>
-          </a:solidFill>
-          <a:ln>
-            <a:noFill/>
-          </a:ln>
-        </p:spPr>
-        <p:txBody>
-          <a:bodyPr anchorCtr="0" anchor="t" bIns="45700" lIns="91425" spcFirstLastPara="1" rIns="91425" wrap="square" tIns="45700">
-            <a:noAutofit/>
-          </a:bodyPr>
-          <a:lstStyle/>
-          <a:p>
-            <a:pPr indent="0" lvl="0" marL="0" marR="0" rtl="0" algn="l">
-              <a:lnSpc>
-                <a:spcPct val="100000"/>
-              </a:lnSpc>
-              <a:spcBef>
-                <a:spcPts val="0"/>
-              </a:spcBef>
-              <a:spcAft>
-                <a:spcPts val="0"/>
-              </a:spcAft>
-              <a:buClr>
-                <a:srgbClr val="000000"/>
-              </a:buClr>
-              <a:buSzPts val="1800"/>
-              <a:buFont typeface="Arial"/>
-              <a:buNone/>
-            </a:pPr>
-            <a:r>
-              <a:t/>
-            </a:r>
-            <a:endParaRPr b="0" i="0" sz="1800" u="none" cap="none" strike="noStrike">
-              <a:solidFill>
-                <a:schemeClr val="dk1"/>
-              </a:solidFill>
-              <a:latin typeface="Calibri"/>
-              <a:ea typeface="Calibri"/>
-              <a:cs typeface="Calibri"/>
-              <a:sym typeface="Calibri"/>
-            </a:endParaRPr>
-          </a:p>
-        </p:txBody>
-      </p:sp>
-      <p:sp>
-        <p:nvSpPr>
-          <p:cNvPr id="424" name="Google Shape;424;p12"/>
-          <p:cNvSpPr/>
-          <p:nvPr/>
-        </p:nvSpPr>
-        <p:spPr>
-          <a:xfrm>
-            <a:off x="12728525" y="2679700"/>
-            <a:ext cx="4044900" cy="1421100"/>
-          </a:xfrm>
-          <a:prstGeom prst="roundRect">
-            <a:avLst>
-              <a:gd fmla="val 50000" name="adj"/>
-            </a:avLst>
-          </a:prstGeom>
-          <a:solidFill>
-            <a:srgbClr val="FBDCD8"/>
-          </a:solidFill>
-          <a:ln>
-            <a:noFill/>
-          </a:ln>
-        </p:spPr>
-        <p:txBody>
-          <a:bodyPr anchorCtr="0" anchor="t" bIns="45700" lIns="91425" spcFirstLastPara="1" rIns="91425" wrap="square" tIns="45700">
-            <a:noAutofit/>
-          </a:bodyPr>
-          <a:lstStyle/>
-          <a:p>
-            <a:pPr indent="0" lvl="0" marL="0" marR="0" rtl="0" algn="l">
-              <a:lnSpc>
-                <a:spcPct val="100000"/>
-              </a:lnSpc>
-              <a:spcBef>
-                <a:spcPts val="0"/>
-              </a:spcBef>
-              <a:spcAft>
-                <a:spcPts val="0"/>
-              </a:spcAft>
-              <a:buClr>
-                <a:srgbClr val="000000"/>
-              </a:buClr>
-              <a:buSzPts val="1800"/>
-              <a:buFont typeface="Arial"/>
-              <a:buNone/>
-            </a:pPr>
-            <a:r>
-              <a:t/>
-            </a:r>
-            <a:endParaRPr b="0" i="0" sz="1800" u="none" cap="none" strike="noStrike">
-              <a:solidFill>
-                <a:schemeClr val="dk1"/>
-              </a:solidFill>
-              <a:latin typeface="Calibri"/>
-              <a:ea typeface="Calibri"/>
-              <a:cs typeface="Calibri"/>
-              <a:sym typeface="Calibri"/>
-            </a:endParaRPr>
-          </a:p>
-        </p:txBody>
-      </p:sp>
-      <p:sp>
-        <p:nvSpPr>
-          <p:cNvPr id="425" name="Google Shape;425;p12"/>
-          <p:cNvSpPr/>
-          <p:nvPr/>
-        </p:nvSpPr>
-        <p:spPr>
-          <a:xfrm>
-            <a:off x="12858350" y="2958395"/>
-            <a:ext cx="3785400" cy="914400"/>
-          </a:xfrm>
-          <a:prstGeom prst="rect">
-            <a:avLst/>
-          </a:prstGeom>
-          <a:noFill/>
-          <a:ln>
-            <a:noFill/>
-          </a:ln>
-        </p:spPr>
-        <p:txBody>
-          <a:bodyPr anchorCtr="0" anchor="t" bIns="25400" lIns="25400" spcFirstLastPara="1" rIns="25400" wrap="square" tIns="25400">
-            <a:normAutofit/>
-          </a:bodyPr>
-          <a:lstStyle/>
-          <a:p>
-            <a:pPr indent="0" lvl="0" marL="0" marR="0" rtl="0" algn="ctr">
-              <a:lnSpc>
-                <a:spcPct val="95294"/>
-              </a:lnSpc>
-              <a:spcBef>
-                <a:spcPts val="0"/>
-              </a:spcBef>
-              <a:spcAft>
-                <a:spcPts val="0"/>
-              </a:spcAft>
-              <a:buClr>
-                <a:srgbClr val="1B2B2E"/>
-              </a:buClr>
-              <a:buSzPts val="2700"/>
-              <a:buFont typeface="Noto Sans"/>
-              <a:buNone/>
-            </a:pPr>
-            <a:r>
-              <a:rPr b="1" i="0" lang="en-US" sz="2700" u="none" cap="none" strike="noStrike">
+              <a:t>1</a:t>
+            </a:r>
+            <a:r>
+              <a:rPr lang="ko-KR" altLang="en-US" sz="2400" b="0" i="0" u="none" strike="noStrike" cap="none">
                 <a:solidFill>
-                  <a:srgbClr val="1B2B2E"/>
-                </a:solidFill>
-                <a:highlight>
-                  <a:srgbClr val="FBDCD8"/>
-                </a:highlight>
-                <a:latin typeface="Noto Sans"/>
-                <a:ea typeface="Noto Sans"/>
-                <a:cs typeface="Noto Sans"/>
-                <a:sym typeface="Noto Sans"/>
-              </a:rPr>
-              <a:t>AI Hub </a:t>
-            </a:r>
-            <a:endParaRPr b="1" i="0" sz="2700" u="none" cap="none" strike="noStrike">
-              <a:solidFill>
-                <a:srgbClr val="1B2B2E"/>
-              </a:solidFill>
-              <a:highlight>
-                <a:srgbClr val="FBDCD8"/>
-              </a:highlight>
-              <a:latin typeface="Noto Sans"/>
-              <a:ea typeface="Noto Sans"/>
-              <a:cs typeface="Noto Sans"/>
-              <a:sym typeface="Noto Sans"/>
-            </a:endParaRPr>
-          </a:p>
-          <a:p>
-            <a:pPr indent="0" lvl="0" marL="0" marR="0" rtl="0" algn="ctr">
-              <a:lnSpc>
-                <a:spcPct val="95294"/>
-              </a:lnSpc>
-              <a:spcBef>
-                <a:spcPts val="0"/>
-              </a:spcBef>
-              <a:spcAft>
-                <a:spcPts val="0"/>
-              </a:spcAft>
-              <a:buClr>
-                <a:srgbClr val="1B2B2E"/>
-              </a:buClr>
-              <a:buSzPts val="2700"/>
-              <a:buFont typeface="Noto Sans"/>
-              <a:buNone/>
-            </a:pPr>
-            <a:r>
-              <a:rPr b="1" i="0" lang="en-US" sz="2700" u="none" cap="none" strike="noStrike">
-                <a:solidFill>
-                  <a:srgbClr val="1B2B2E"/>
-                </a:solidFill>
-                <a:highlight>
-                  <a:srgbClr val="FBDCD8"/>
-                </a:highlight>
-                <a:latin typeface="Noto Sans"/>
-                <a:ea typeface="Noto Sans"/>
-                <a:cs typeface="Noto Sans"/>
-                <a:sym typeface="Noto Sans"/>
-              </a:rPr>
-              <a:t>정신건강 의미 구축 </a:t>
-            </a:r>
-            <a:endParaRPr b="0" i="0" sz="2700" u="none" cap="none" strike="noStrike">
-              <a:solidFill>
-                <a:schemeClr val="dk1"/>
-              </a:solidFill>
-              <a:latin typeface="Calibri"/>
-              <a:ea typeface="Calibri"/>
-              <a:cs typeface="Calibri"/>
-              <a:sym typeface="Calibri"/>
-            </a:endParaRPr>
-          </a:p>
-        </p:txBody>
-      </p:sp>
-      <p:sp>
-        <p:nvSpPr>
-          <p:cNvPr id="426" name="Google Shape;426;p12"/>
-          <p:cNvSpPr/>
-          <p:nvPr/>
-        </p:nvSpPr>
-        <p:spPr>
-          <a:xfrm>
-            <a:off x="12667850" y="4533888"/>
-            <a:ext cx="4166400" cy="981000"/>
-          </a:xfrm>
-          <a:prstGeom prst="rect">
-            <a:avLst/>
-          </a:prstGeom>
-          <a:noFill/>
-          <a:ln>
-            <a:noFill/>
-          </a:ln>
-        </p:spPr>
-        <p:txBody>
-          <a:bodyPr anchorCtr="0" anchor="t" bIns="25400" lIns="25400" spcFirstLastPara="1" rIns="25400" wrap="square" tIns="25400">
-            <a:normAutofit/>
-          </a:bodyPr>
-          <a:lstStyle/>
-          <a:p>
-            <a:pPr indent="0" lvl="0" marL="0" marR="0" rtl="0" algn="l">
-              <a:lnSpc>
-                <a:spcPct val="129729"/>
-              </a:lnSpc>
-              <a:spcBef>
-                <a:spcPts val="0"/>
-              </a:spcBef>
-              <a:spcAft>
-                <a:spcPts val="0"/>
-              </a:spcAft>
-              <a:buClr>
-                <a:srgbClr val="E4574C"/>
-              </a:buClr>
-              <a:buSzPts val="2400"/>
-              <a:buFont typeface="Noto Sans"/>
-              <a:buNone/>
-            </a:pPr>
-            <a:r>
-              <a:rPr b="1" i="0" lang="en-US" sz="2400" u="none" cap="none" strike="noStrike">
-                <a:solidFill>
-                  <a:srgbClr val="E4574C"/>
+                  <a:srgbClr val="1b2b2e"/>
                 </a:solidFill>
                 <a:latin typeface="Noto Sans"/>
                 <a:ea typeface="Noto Sans"/>
                 <a:cs typeface="Noto Sans"/>
                 <a:sym typeface="Noto Sans"/>
               </a:rPr>
-              <a:t>Source: </a:t>
-            </a:r>
-            <a:r>
-              <a:rPr b="0" i="0" lang="en-US" sz="2400" u="none" cap="none" strike="noStrike">
+              <a:t>차 이상 점수와 결합하여 </a:t>
+            </a:r>
+            <a:r>
+              <a:rPr lang="en-US" altLang="ko-KR" sz="2400" b="0" i="0" u="none" strike="noStrike" cap="none">
                 <a:solidFill>
-                  <a:srgbClr val="1B2B2E"/>
+                  <a:srgbClr val="1b2b2e"/>
                 </a:solidFill>
                 <a:latin typeface="Noto Sans"/>
                 <a:ea typeface="Noto Sans"/>
                 <a:cs typeface="Noto Sans"/>
                 <a:sym typeface="Noto Sans"/>
               </a:rPr>
-              <a:t>전문 임상의 선정 우울/불안 임상 키워드</a:t>
-            </a:r>
-            <a:endParaRPr b="0" i="0" sz="2400" u="none" cap="none" strike="noStrike">
-              <a:solidFill>
-                <a:schemeClr val="dk1"/>
-              </a:solidFill>
-              <a:latin typeface="Calibri"/>
-              <a:ea typeface="Calibri"/>
-              <a:cs typeface="Calibri"/>
-              <a:sym typeface="Calibri"/>
-            </a:endParaRPr>
-          </a:p>
-        </p:txBody>
-      </p:sp>
-      <p:sp>
-        <p:nvSpPr>
-          <p:cNvPr id="427" name="Google Shape;427;p12"/>
-          <p:cNvSpPr/>
-          <p:nvPr/>
-        </p:nvSpPr>
-        <p:spPr>
-          <a:xfrm>
-            <a:off x="12607175" y="6248450"/>
-            <a:ext cx="4166400" cy="1895400"/>
-          </a:xfrm>
-          <a:prstGeom prst="rect">
-            <a:avLst/>
-          </a:prstGeom>
-          <a:noFill/>
-          <a:ln>
-            <a:noFill/>
-          </a:ln>
-        </p:spPr>
-        <p:txBody>
-          <a:bodyPr anchorCtr="0" anchor="t" bIns="25400" lIns="25400" spcFirstLastPara="1" rIns="25400" wrap="square" tIns="25400">
-            <a:normAutofit/>
-          </a:bodyPr>
-          <a:lstStyle/>
-          <a:p>
-            <a:pPr indent="0" lvl="0" marL="0" marR="0" rtl="0" algn="l">
-              <a:lnSpc>
-                <a:spcPct val="129729"/>
-              </a:lnSpc>
-              <a:spcBef>
-                <a:spcPts val="0"/>
-              </a:spcBef>
-              <a:spcAft>
-                <a:spcPts val="0"/>
-              </a:spcAft>
-              <a:buClr>
-                <a:srgbClr val="E4574C"/>
-              </a:buClr>
-              <a:buSzPts val="2400"/>
-              <a:buFont typeface="Noto Sans"/>
-              <a:buNone/>
-            </a:pPr>
-            <a:r>
-              <a:rPr b="1" i="0" lang="en-US" sz="2400" u="none" cap="none" strike="noStrike">
+              <a:t>LightGBM</a:t>
+            </a:r>
+            <a:r>
+              <a:rPr lang="ko-KR" altLang="en-US" sz="2400" b="0" i="0" u="none" strike="noStrike" cap="none">
                 <a:solidFill>
-                  <a:srgbClr val="E4574C"/>
+                  <a:srgbClr val="1b2b2e"/>
                 </a:solidFill>
                 <a:latin typeface="Noto Sans"/>
                 <a:ea typeface="Noto Sans"/>
                 <a:cs typeface="Noto Sans"/>
                 <a:sym typeface="Noto Sans"/>
               </a:rPr>
-              <a:t>Access: </a:t>
-            </a:r>
-            <a:r>
-              <a:rPr b="0" i="0" lang="en-US" sz="2400" u="none" cap="none" strike="noStrike">
+              <a:t> </a:t>
+            </a:r>
+            <a:r>
+              <a:rPr lang="en-US" altLang="ko-KR" sz="2400" b="0" i="0" u="none" strike="noStrike" cap="none">
                 <a:solidFill>
-                  <a:srgbClr val="1B2B2E"/>
+                  <a:srgbClr val="1b2b2e"/>
                 </a:solidFill>
                 <a:latin typeface="Noto Sans"/>
                 <a:ea typeface="Noto Sans"/>
                 <a:cs typeface="Noto Sans"/>
                 <a:sym typeface="Noto Sans"/>
               </a:rPr>
-              <a:t>안</a:t>
-            </a:r>
-            <a:r>
-              <a:rPr b="0" i="0" lang="en-US" sz="2400" u="none" cap="none" strike="noStrike">
+              <a:t>2</a:t>
+            </a:r>
+            <a:r>
+              <a:rPr lang="ko-KR" altLang="en-US" sz="2400" b="0" i="0" u="none" strike="noStrike" cap="none">
                 <a:solidFill>
-                  <a:schemeClr val="dk1"/>
-                </a:solidFill>
-                <a:latin typeface="Calibri"/>
-                <a:ea typeface="Calibri"/>
-                <a:cs typeface="Calibri"/>
-                <a:sym typeface="Calibri"/>
-              </a:rPr>
-              <a:t>심존 전용. 기관 승인이 필요해 개인/학생 자격으로는 MVP 기간 내 확보가 어려워 MVP 범위에서는 제외, 상용화 단계에서 기관 협약을 통해 재검토 </a:t>
-            </a:r>
-            <a:endParaRPr b="0" i="0" sz="2400" u="none" cap="none" strike="noStrike">
-              <a:solidFill>
-                <a:schemeClr val="dk1"/>
-              </a:solidFill>
-              <a:latin typeface="Calibri"/>
-              <a:ea typeface="Calibri"/>
-              <a:cs typeface="Calibri"/>
-              <a:sym typeface="Calibri"/>
-            </a:endParaRPr>
-          </a:p>
-        </p:txBody>
-      </p:sp>
-      <p:sp>
-        <p:nvSpPr>
-          <p:cNvPr id="428" name="Google Shape;428;p12"/>
-          <p:cNvSpPr/>
-          <p:nvPr/>
-        </p:nvSpPr>
-        <p:spPr>
-          <a:xfrm>
-            <a:off x="1054100" y="635000"/>
-            <a:ext cx="76200" cy="482600"/>
-          </a:xfrm>
-          <a:prstGeom prst="rect">
-            <a:avLst/>
-          </a:prstGeom>
-          <a:solidFill>
-            <a:srgbClr val="2C7A73"/>
-          </a:solidFill>
-          <a:ln>
-            <a:noFill/>
-          </a:ln>
-        </p:spPr>
-        <p:txBody>
-          <a:bodyPr anchorCtr="0" anchor="t" bIns="45700" lIns="91425" spcFirstLastPara="1" rIns="91425" wrap="square" tIns="45700">
-            <a:noAutofit/>
-          </a:bodyPr>
-          <a:lstStyle/>
-          <a:p>
-            <a:pPr indent="0" lvl="0" marL="0" marR="0" rtl="0" algn="l">
-              <a:lnSpc>
-                <a:spcPct val="100000"/>
-              </a:lnSpc>
-              <a:spcBef>
-                <a:spcPts val="0"/>
-              </a:spcBef>
-              <a:spcAft>
-                <a:spcPts val="0"/>
-              </a:spcAft>
-              <a:buClr>
-                <a:srgbClr val="000000"/>
-              </a:buClr>
-              <a:buSzPts val="1800"/>
-              <a:buFont typeface="Arial"/>
-              <a:buNone/>
-            </a:pPr>
-            <a:r>
-              <a:t/>
-            </a:r>
-            <a:endParaRPr b="0" i="0" sz="1800" u="none" cap="none" strike="noStrike">
-              <a:solidFill>
-                <a:schemeClr val="lt1"/>
-              </a:solidFill>
-              <a:latin typeface="Calibri"/>
-              <a:ea typeface="Calibri"/>
-              <a:cs typeface="Calibri"/>
-              <a:sym typeface="Calibri"/>
-            </a:endParaRPr>
-          </a:p>
-        </p:txBody>
-      </p:sp>
-      <p:sp>
-        <p:nvSpPr>
-          <p:cNvPr id="429" name="Google Shape;429;p12"/>
-          <p:cNvSpPr txBox="1"/>
-          <p:nvPr/>
-        </p:nvSpPr>
-        <p:spPr>
-          <a:xfrm>
-            <a:off x="1282700" y="508000"/>
-            <a:ext cx="14605000" cy="685800"/>
-          </a:xfrm>
-          <a:prstGeom prst="rect">
-            <a:avLst/>
-          </a:prstGeom>
-          <a:noFill/>
-          <a:ln>
-            <a:noFill/>
-          </a:ln>
-        </p:spPr>
-        <p:txBody>
-          <a:bodyPr anchorCtr="0" anchor="ctr" bIns="45700" lIns="91425" spcFirstLastPara="1" rIns="91425" wrap="square" tIns="45700">
-            <a:noAutofit/>
-          </a:bodyPr>
-          <a:lstStyle/>
-          <a:p>
-            <a:pPr indent="0" lvl="0" marL="0" marR="0" rtl="0" algn="l">
-              <a:lnSpc>
-                <a:spcPct val="100000"/>
-              </a:lnSpc>
-              <a:spcBef>
-                <a:spcPts val="0"/>
-              </a:spcBef>
-              <a:spcAft>
-                <a:spcPts val="0"/>
-              </a:spcAft>
-              <a:buClr>
-                <a:srgbClr val="000000"/>
-              </a:buClr>
-              <a:buSzPts val="3000"/>
-              <a:buFont typeface="Arial"/>
-              <a:buNone/>
-            </a:pPr>
-            <a:r>
-              <a:rPr b="1" i="0" lang="en-US" sz="3000" u="none" cap="none" strike="noStrike">
-                <a:solidFill>
-                  <a:srgbClr val="1B2B2E"/>
+                  <a:srgbClr val="1b2b2e"/>
                 </a:solidFill>
                 <a:latin typeface="Noto Sans"/>
                 <a:ea typeface="Noto Sans"/>
                 <a:cs typeface="Noto Sans"/>
                 <a:sym typeface="Noto Sans"/>
               </a:rPr>
-              <a:t>학습 데이터셋 확보 계획</a:t>
-            </a:r>
-            <a:endParaRPr b="0" i="0" sz="1400" u="none" cap="none" strike="noStrike">
-              <a:solidFill>
-                <a:srgbClr val="000000"/>
-              </a:solidFill>
-              <a:latin typeface="Arial"/>
-              <a:ea typeface="Arial"/>
-              <a:cs typeface="Arial"/>
-              <a:sym typeface="Arial"/>
+              <a:t>차 위험도 분류 지도학습</a:t>
+            </a:r>
+            <a:endParaRPr lang="ko-KR" altLang="en-US" sz="2400" b="0" i="0" u="none" strike="noStrike" cap="none">
+              <a:solidFill>
+                <a:srgbClr val="1b2b2e"/>
+              </a:solidFill>
+              <a:latin typeface="Noto Sans"/>
+              <a:ea typeface="Noto Sans"/>
+              <a:cs typeface="Noto Sans"/>
+              <a:sym typeface="Noto Sans"/>
             </a:endParaRPr>
           </a:p>
         </p:txBody>
@@ -34672,11 +34656,11 @@
 </file>
 
 <file path=ppt/slides/slide8.xml><?xml version="1.0" encoding="utf-8"?>
-<p:sld xmlns:a="http://schemas.openxmlformats.org/drawingml/2006/main" xmlns:r="http://schemas.openxmlformats.org/officeDocument/2006/relationships" xmlns:mc="http://schemas.openxmlformats.org/markup-compatibility/2006" xmlns:mv="urn:schemas-microsoft-com:mac:vml" xmlns:p="http://schemas.openxmlformats.org/presentationml/2006/main" xmlns:c="http://schemas.openxmlformats.org/drawingml/2006/chart" xmlns:dgm="http://schemas.openxmlformats.org/drawingml/2006/diagram" xmlns:o="urn:schemas-microsoft-com:office:office" xmlns:v="urn:schemas-microsoft-com:vml" xmlns:pvml="urn:schemas-microsoft-com:office:powerpoint" xmlns:com="http://schemas.openxmlformats.org/drawingml/2006/compatibility" xmlns:p14="http://schemas.microsoft.com/office/powerpoint/2010/main" xmlns:p15="http://schemas.microsoft.com/office/powerpoint/2012/main" xmlns:ahyp="http://schemas.microsoft.com/office/drawing/2018/hyperlinkcolor">
+<p:sld xmlns:r="http://schemas.openxmlformats.org/officeDocument/2006/relationships" xmlns:c="http://schemas.openxmlformats.org/drawingml/2006/chart" xmlns:a="http://schemas.openxmlformats.org/drawingml/2006/main" xmlns:dgm="http://schemas.openxmlformats.org/drawingml/2006/diagram" xmlns:dsp="http://schemas.microsoft.com/office/drawing/2008/diagram" xmlns:p="http://schemas.openxmlformats.org/presentationml/2006/main">
   <p:cSld>
     <p:spTree>
       <p:nvGrpSpPr>
-        <p:cNvPr id="268" name="Shape 268"/>
+        <p:cNvPr id="1" name=""/>
         <p:cNvGrpSpPr/>
         <p:nvPr/>
       </p:nvGrpSpPr>
@@ -35110,12 +35094,12 @@
           </a:ln>
         </p:spPr>
         <p:txBody>
-          <a:bodyPr anchorCtr="0" anchor="t" bIns="25400" lIns="25400" spcFirstLastPara="1" rIns="25400" wrap="square" tIns="25400">
-            <a:normAutofit/>
-          </a:bodyPr>
-          <a:lstStyle/>
-          <a:p>
-            <a:pPr indent="0" lvl="0" marL="0" marR="0" rtl="0" algn="l">
+          <a:bodyPr wrap="square" lIns="25400" tIns="25400" rIns="25400" bIns="25400" anchor="t" anchorCtr="0">
+            <a:normAutofit lnSpcReduction="10000"/>
+          </a:bodyPr>
+          <a:lstStyle/>
+          <a:p>
+            <a:pPr marL="0" marR="0" lvl="0" indent="0" algn="l" rtl="0">
               <a:lnSpc>
                 <a:spcPct val="133472"/>
               </a:lnSpc>
@@ -35126,32 +35110,81 @@
                 <a:spcPts val="0"/>
               </a:spcAft>
               <a:buClr>
-                <a:srgbClr val="1B2B2E"/>
-              </a:buClr>
-              <a:buSzPts val="581"/>
+                <a:srgbClr val="1b2b2e"/>
+              </a:buClr>
+              <a:buSzPct val="25000"/>
               <a:buFont typeface="Noto Sans"/>
               <a:buNone/>
-            </a:pPr>
-            <a:r>
-              <a:rPr b="0" i="0" lang="en-US" sz="2325" u="none" cap="none" strike="noStrike">
+              <a:defRPr/>
+            </a:pPr>
+            <a:r>
+              <a:rPr lang="en-US" sz="2325" b="0" i="0" u="none" strike="noStrike" cap="none">
                 <a:solidFill>
-                  <a:srgbClr val="1B2B2E"/>
+                  <a:srgbClr val="1b2b2e"/>
                 </a:solidFill>
                 <a:latin typeface="Noto Sans"/>
                 <a:ea typeface="Noto Sans"/>
                 <a:cs typeface="Noto Sans"/>
                 <a:sym typeface="Noto Sans"/>
               </a:rPr>
-              <a:t>스마트워치(Health Connect), 체성분계, 앱 클라이언트(React/Flutter).</a:t>
-            </a:r>
-            <a:endParaRPr b="0" i="0" sz="2325" u="none" cap="none" strike="noStrike">
-              <a:solidFill>
-                <a:schemeClr val="dk1"/>
-              </a:solidFill>
-              <a:latin typeface="Calibri"/>
-              <a:ea typeface="Calibri"/>
-              <a:cs typeface="Calibri"/>
-              <a:sym typeface="Calibri"/>
+              <a:t>스마트워치(Health Connect), 체성분계, 앱 클라이언트(Flutter)</a:t>
+            </a:r>
+            <a:r>
+              <a:rPr lang="ko-KR" altLang="en-US" sz="2325" b="0" i="0" u="none" strike="noStrike" cap="none">
+                <a:solidFill>
+                  <a:srgbClr val="1b2b2e"/>
+                </a:solidFill>
+                <a:latin typeface="Noto Sans"/>
+                <a:ea typeface="Noto Sans"/>
+                <a:cs typeface="Noto Sans"/>
+                <a:sym typeface="Noto Sans"/>
+              </a:rPr>
+              <a:t> · 관리자 웹</a:t>
+            </a:r>
+            <a:r>
+              <a:rPr lang="en-US" altLang="ko-KR" sz="2325" b="0" i="0" u="none" strike="noStrike" cap="none">
+                <a:solidFill>
+                  <a:srgbClr val="1b2b2e"/>
+                </a:solidFill>
+                <a:latin typeface="Noto Sans"/>
+                <a:ea typeface="Noto Sans"/>
+                <a:cs typeface="Noto Sans"/>
+                <a:sym typeface="Noto Sans"/>
+              </a:rPr>
+              <a:t>(</a:t>
+            </a:r>
+            <a:r>
+              <a:rPr lang="en-US" sz="2325" b="0" i="0" u="none" strike="noStrike" cap="none">
+                <a:solidFill>
+                  <a:srgbClr val="1b2b2e"/>
+                </a:solidFill>
+                <a:latin typeface="Noto Sans"/>
+                <a:ea typeface="Noto Sans"/>
+                <a:cs typeface="Noto Sans"/>
+                <a:sym typeface="Noto Sans"/>
+              </a:rPr>
+              <a:t>React</a:t>
+            </a:r>
+            <a:r>
+              <a:rPr lang="en-US" altLang="ko-KR" sz="2325" b="0" i="0" u="none" strike="noStrike" cap="none">
+                <a:solidFill>
+                  <a:srgbClr val="1b2b2e"/>
+                </a:solidFill>
+                <a:latin typeface="Noto Sans"/>
+                <a:ea typeface="Noto Sans"/>
+                <a:cs typeface="Noto Sans"/>
+                <a:sym typeface="Noto Sans"/>
+              </a:rPr>
+              <a:t>)</a:t>
+            </a:r>
+            <a:endParaRPr lang="en-US" sz="2325" b="0" i="0" u="none" strike="noStrike" cap="none">
+              <a:solidFill>
+                <a:srgbClr val="1b2b2e"/>
+              </a:solidFill>
+              <a:latin typeface="Noto Sans"/>
+              <a:ea typeface="Noto Sans"/>
+              <a:cs typeface="Noto Sans"/>
+              <a:sym typeface="Noto Sans"/>
             </a:endParaRPr>
           </a:p>
         </p:txBody>
